--- a/(승건)Figure.pptx
+++ b/(승건)Figure.pptx
@@ -5,11 +5,12 @@
     <p:sldMasterId id="2147483648" r:id="rId1"/>
   </p:sldMasterIdLst>
   <p:notesMasterIdLst>
-    <p:notesMasterId r:id="rId4"/>
+    <p:notesMasterId r:id="rId5"/>
   </p:notesMasterIdLst>
   <p:sldIdLst>
     <p:sldId id="257" r:id="rId2"/>
     <p:sldId id="258" r:id="rId3"/>
+    <p:sldId id="260" r:id="rId4"/>
   </p:sldIdLst>
   <p:sldSz cx="12192000" cy="6858000"/>
   <p:notesSz cx="6858000" cy="9144000"/>
@@ -198,7 +199,7 @@
           <a:p>
             <a:fld id="{6D07E46F-B36E-448D-82D2-486DFE961E56}" type="datetimeFigureOut">
               <a:rPr lang="ko-KR" altLang="en-US" smtClean="0"/>
-              <a:t>2026-04-17</a:t>
+              <a:t>2026-04-19</a:t>
             </a:fld>
             <a:endParaRPr lang="ko-KR" altLang="en-US"/>
           </a:p>
@@ -696,7 +697,7 @@
           <a:p>
             <a:fld id="{8ACA7197-8235-4E7A-BCE4-33C09BF0AC50}" type="datetimeFigureOut">
               <a:rPr lang="ko-KR" altLang="en-US" smtClean="0"/>
-              <a:t>2026-04-17</a:t>
+              <a:t>2026-04-19</a:t>
             </a:fld>
             <a:endParaRPr lang="ko-KR" altLang="en-US"/>
           </a:p>
@@ -894,7 +895,7 @@
           <a:p>
             <a:fld id="{8ACA7197-8235-4E7A-BCE4-33C09BF0AC50}" type="datetimeFigureOut">
               <a:rPr lang="ko-KR" altLang="en-US" smtClean="0"/>
-              <a:t>2026-04-17</a:t>
+              <a:t>2026-04-19</a:t>
             </a:fld>
             <a:endParaRPr lang="ko-KR" altLang="en-US"/>
           </a:p>
@@ -1102,7 +1103,7 @@
           <a:p>
             <a:fld id="{8ACA7197-8235-4E7A-BCE4-33C09BF0AC50}" type="datetimeFigureOut">
               <a:rPr lang="ko-KR" altLang="en-US" smtClean="0"/>
-              <a:t>2026-04-17</a:t>
+              <a:t>2026-04-19</a:t>
             </a:fld>
             <a:endParaRPr lang="ko-KR" altLang="en-US"/>
           </a:p>
@@ -1300,7 +1301,7 @@
           <a:p>
             <a:fld id="{8ACA7197-8235-4E7A-BCE4-33C09BF0AC50}" type="datetimeFigureOut">
               <a:rPr lang="ko-KR" altLang="en-US" smtClean="0"/>
-              <a:t>2026-04-17</a:t>
+              <a:t>2026-04-19</a:t>
             </a:fld>
             <a:endParaRPr lang="ko-KR" altLang="en-US"/>
           </a:p>
@@ -1575,7 +1576,7 @@
           <a:p>
             <a:fld id="{8ACA7197-8235-4E7A-BCE4-33C09BF0AC50}" type="datetimeFigureOut">
               <a:rPr lang="ko-KR" altLang="en-US" smtClean="0"/>
-              <a:t>2026-04-17</a:t>
+              <a:t>2026-04-19</a:t>
             </a:fld>
             <a:endParaRPr lang="ko-KR" altLang="en-US"/>
           </a:p>
@@ -1840,7 +1841,7 @@
           <a:p>
             <a:fld id="{8ACA7197-8235-4E7A-BCE4-33C09BF0AC50}" type="datetimeFigureOut">
               <a:rPr lang="ko-KR" altLang="en-US" smtClean="0"/>
-              <a:t>2026-04-17</a:t>
+              <a:t>2026-04-19</a:t>
             </a:fld>
             <a:endParaRPr lang="ko-KR" altLang="en-US"/>
           </a:p>
@@ -2252,7 +2253,7 @@
           <a:p>
             <a:fld id="{8ACA7197-8235-4E7A-BCE4-33C09BF0AC50}" type="datetimeFigureOut">
               <a:rPr lang="ko-KR" altLang="en-US" smtClean="0"/>
-              <a:t>2026-04-17</a:t>
+              <a:t>2026-04-19</a:t>
             </a:fld>
             <a:endParaRPr lang="ko-KR" altLang="en-US"/>
           </a:p>
@@ -2393,7 +2394,7 @@
           <a:p>
             <a:fld id="{8ACA7197-8235-4E7A-BCE4-33C09BF0AC50}" type="datetimeFigureOut">
               <a:rPr lang="ko-KR" altLang="en-US" smtClean="0"/>
-              <a:t>2026-04-17</a:t>
+              <a:t>2026-04-19</a:t>
             </a:fld>
             <a:endParaRPr lang="ko-KR" altLang="en-US"/>
           </a:p>
@@ -2506,7 +2507,7 @@
           <a:p>
             <a:fld id="{8ACA7197-8235-4E7A-BCE4-33C09BF0AC50}" type="datetimeFigureOut">
               <a:rPr lang="ko-KR" altLang="en-US" smtClean="0"/>
-              <a:t>2026-04-17</a:t>
+              <a:t>2026-04-19</a:t>
             </a:fld>
             <a:endParaRPr lang="ko-KR" altLang="en-US"/>
           </a:p>
@@ -2817,7 +2818,7 @@
           <a:p>
             <a:fld id="{8ACA7197-8235-4E7A-BCE4-33C09BF0AC50}" type="datetimeFigureOut">
               <a:rPr lang="ko-KR" altLang="en-US" smtClean="0"/>
-              <a:t>2026-04-17</a:t>
+              <a:t>2026-04-19</a:t>
             </a:fld>
             <a:endParaRPr lang="ko-KR" altLang="en-US"/>
           </a:p>
@@ -3105,7 +3106,7 @@
           <a:p>
             <a:fld id="{8ACA7197-8235-4E7A-BCE4-33C09BF0AC50}" type="datetimeFigureOut">
               <a:rPr lang="ko-KR" altLang="en-US" smtClean="0"/>
-              <a:t>2026-04-17</a:t>
+              <a:t>2026-04-19</a:t>
             </a:fld>
             <a:endParaRPr lang="ko-KR" altLang="en-US"/>
           </a:p>
@@ -3346,7 +3347,7 @@
           <a:p>
             <a:fld id="{8ACA7197-8235-4E7A-BCE4-33C09BF0AC50}" type="datetimeFigureOut">
               <a:rPr lang="ko-KR" altLang="en-US" smtClean="0"/>
-              <a:t>2026-04-17</a:t>
+              <a:t>2026-04-19</a:t>
             </a:fld>
             <a:endParaRPr lang="ko-KR" altLang="en-US"/>
           </a:p>
@@ -7839,8 +7840,8 @@
         </p:nvSpPr>
         <p:spPr>
           <a:xfrm>
-            <a:off x="7825739" y="947102"/>
-            <a:ext cx="80391" cy="3980815"/>
+            <a:off x="7852410" y="947102"/>
+            <a:ext cx="53720" cy="3980815"/>
           </a:xfrm>
           <a:prstGeom prst="rect">
             <a:avLst/>
@@ -7887,6 +7888,7 @@
             </a:extLst>
           </p:cNvPr>
           <p:cNvCxnSpPr>
+            <a:cxnSpLocks/>
             <a:stCxn id="96" idx="2"/>
             <a:endCxn id="16" idx="0"/>
           </p:cNvCxnSpPr>
@@ -7894,8 +7896,8 @@
         </p:nvCxnSpPr>
         <p:spPr>
           <a:xfrm>
-            <a:off x="7865935" y="4927917"/>
-            <a:ext cx="585407" cy="526987"/>
+            <a:off x="7879270" y="4927917"/>
+            <a:ext cx="572072" cy="526987"/>
           </a:xfrm>
           <a:prstGeom prst="straightConnector1">
             <a:avLst/>
@@ -8442,10 +8444,4299 @@
           </a:prstGeom>
         </p:spPr>
       </p:pic>
+      <p:sp>
+        <p:nvSpPr>
+          <p:cNvPr id="2" name="자유형: 도형 1">
+            <a:extLst>
+              <a:ext uri="{FF2B5EF4-FFF2-40B4-BE49-F238E27FC236}">
+                <a16:creationId xmlns:a16="http://schemas.microsoft.com/office/drawing/2014/main" id="{0DE24286-17EE-4822-AD8D-7117AAD2E24D}"/>
+              </a:ext>
+            </a:extLst>
+          </p:cNvPr>
+          <p:cNvSpPr/>
+          <p:nvPr/>
+        </p:nvSpPr>
+        <p:spPr>
+          <a:xfrm>
+            <a:off x="3666456" y="1458984"/>
+            <a:ext cx="1018794" cy="521208"/>
+          </a:xfrm>
+          <a:custGeom>
+            <a:avLst/>
+            <a:gdLst>
+              <a:gd name="connsiteX0" fmla="*/ 2760617 w 2760617"/>
+              <a:gd name="connsiteY0" fmla="*/ 0 h 3901440"/>
+              <a:gd name="connsiteX1" fmla="*/ 1323703 w 2760617"/>
+              <a:gd name="connsiteY1" fmla="*/ 3126377 h 3901440"/>
+              <a:gd name="connsiteX2" fmla="*/ 0 w 2760617"/>
+              <a:gd name="connsiteY2" fmla="*/ 3901440 h 3901440"/>
+            </a:gdLst>
+            <a:ahLst/>
+            <a:cxnLst>
+              <a:cxn ang="0">
+                <a:pos x="connsiteX0" y="connsiteY0"/>
+              </a:cxn>
+              <a:cxn ang="0">
+                <a:pos x="connsiteX1" y="connsiteY1"/>
+              </a:cxn>
+              <a:cxn ang="0">
+                <a:pos x="connsiteX2" y="connsiteY2"/>
+              </a:cxn>
+            </a:cxnLst>
+            <a:rect l="l" t="t" r="r" b="b"/>
+            <a:pathLst>
+              <a:path w="2760617" h="3901440">
+                <a:moveTo>
+                  <a:pt x="2760617" y="0"/>
+                </a:moveTo>
+                <a:cubicBezTo>
+                  <a:pt x="2272211" y="1238068"/>
+                  <a:pt x="1783806" y="2476137"/>
+                  <a:pt x="1323703" y="3126377"/>
+                </a:cubicBezTo>
+                <a:cubicBezTo>
+                  <a:pt x="863600" y="3776617"/>
+                  <a:pt x="431800" y="3839028"/>
+                  <a:pt x="0" y="3901440"/>
+                </a:cubicBezTo>
+              </a:path>
+            </a:pathLst>
+          </a:custGeom>
+          <a:noFill/>
+          <a:ln>
+            <a:solidFill>
+              <a:schemeClr val="tx1"/>
+            </a:solidFill>
+            <a:tailEnd type="arrow"/>
+          </a:ln>
+        </p:spPr>
+        <p:style>
+          <a:lnRef idx="2">
+            <a:schemeClr val="accent1">
+              <a:shade val="50000"/>
+            </a:schemeClr>
+          </a:lnRef>
+          <a:fillRef idx="1">
+            <a:schemeClr val="accent1"/>
+          </a:fillRef>
+          <a:effectRef idx="0">
+            <a:schemeClr val="accent1"/>
+          </a:effectRef>
+          <a:fontRef idx="minor">
+            <a:schemeClr val="lt1"/>
+          </a:fontRef>
+        </p:style>
+        <p:txBody>
+          <a:bodyPr rtlCol="0" anchor="ctr"/>
+          <a:lstStyle/>
+          <a:p>
+            <a:pPr algn="ctr"/>
+            <a:endParaRPr lang="ko-KR" altLang="en-US"/>
+          </a:p>
+        </p:txBody>
+      </p:sp>
+      <p:sp>
+        <p:nvSpPr>
+          <p:cNvPr id="54" name="TextBox 53">
+            <a:extLst>
+              <a:ext uri="{FF2B5EF4-FFF2-40B4-BE49-F238E27FC236}">
+                <a16:creationId xmlns:a16="http://schemas.microsoft.com/office/drawing/2014/main" id="{AE706875-EAB1-48E5-A32E-8683B64C8C28}"/>
+              </a:ext>
+            </a:extLst>
+          </p:cNvPr>
+          <p:cNvSpPr txBox="1"/>
+          <p:nvPr/>
+        </p:nvSpPr>
+        <p:spPr>
+          <a:xfrm>
+            <a:off x="2117254" y="1633920"/>
+            <a:ext cx="1542287" cy="461665"/>
+          </a:xfrm>
+          <a:prstGeom prst="rect">
+            <a:avLst/>
+          </a:prstGeom>
+          <a:noFill/>
+        </p:spPr>
+        <p:txBody>
+          <a:bodyPr wrap="square">
+            <a:spAutoFit/>
+          </a:bodyPr>
+          <a:lstStyle/>
+          <a:p>
+            <a:pPr algn="ctr"/>
+            <a:r>
+              <a:rPr lang="en-US" altLang="ko-KR" sz="1200" dirty="0">
+                <a:solidFill>
+                  <a:schemeClr val="tx1"/>
+                </a:solidFill>
+                <a:latin typeface="나눔고딕" panose="020D0604000000000000" pitchFamily="50" charset="-127"/>
+                <a:ea typeface="나눔고딕" panose="020D0604000000000000" pitchFamily="50" charset="-127"/>
+              </a:rPr>
+              <a:t>BM25: </a:t>
+            </a:r>
+            <a:r>
+              <a:rPr lang="en-US" altLang="ko-KR" sz="1200" dirty="0" err="1">
+                <a:solidFill>
+                  <a:schemeClr val="tx1"/>
+                </a:solidFill>
+                <a:latin typeface="나눔고딕" panose="020D0604000000000000" pitchFamily="50" charset="-127"/>
+                <a:ea typeface="나눔고딕" panose="020D0604000000000000" pitchFamily="50" charset="-127"/>
+              </a:rPr>
+              <a:t>Opensearch</a:t>
+            </a:r>
+            <a:endParaRPr lang="en-US" altLang="ko-KR" sz="1200" dirty="0">
+              <a:solidFill>
+                <a:schemeClr val="tx1"/>
+              </a:solidFill>
+              <a:latin typeface="나눔고딕" panose="020D0604000000000000" pitchFamily="50" charset="-127"/>
+              <a:ea typeface="나눔고딕" panose="020D0604000000000000" pitchFamily="50" charset="-127"/>
+            </a:endParaRPr>
+          </a:p>
+          <a:p>
+            <a:pPr algn="ctr"/>
+            <a:r>
+              <a:rPr lang="en-US" altLang="ko-KR" sz="1200" dirty="0">
+                <a:latin typeface="나눔고딕" panose="020D0604000000000000" pitchFamily="50" charset="-127"/>
+                <a:ea typeface="나눔고딕" panose="020D0604000000000000" pitchFamily="50" charset="-127"/>
+              </a:rPr>
+              <a:t>Dense: BAAI </a:t>
+            </a:r>
+            <a:r>
+              <a:rPr lang="en-US" altLang="ko-KR" sz="1200" dirty="0" err="1">
+                <a:latin typeface="나눔고딕" panose="020D0604000000000000" pitchFamily="50" charset="-127"/>
+                <a:ea typeface="나눔고딕" panose="020D0604000000000000" pitchFamily="50" charset="-127"/>
+              </a:rPr>
+              <a:t>bge</a:t>
+            </a:r>
+            <a:endParaRPr lang="en-US" altLang="ko-KR" sz="1200" dirty="0">
+              <a:latin typeface="나눔고딕" panose="020D0604000000000000" pitchFamily="50" charset="-127"/>
+              <a:ea typeface="나눔고딕" panose="020D0604000000000000" pitchFamily="50" charset="-127"/>
+            </a:endParaRPr>
+          </a:p>
+        </p:txBody>
+      </p:sp>
     </p:spTree>
     <p:extLst>
       <p:ext uri="{BB962C8B-B14F-4D97-AF65-F5344CB8AC3E}">
         <p14:creationId xmlns:p14="http://schemas.microsoft.com/office/powerpoint/2010/main" val="1899160239"/>
+      </p:ext>
+    </p:extLst>
+  </p:cSld>
+  <p:clrMapOvr>
+    <a:masterClrMapping/>
+  </p:clrMapOvr>
+</p:sld>
+</file>
+
+<file path=ppt/slides/slide3.xml><?xml version="1.0" encoding="utf-8"?>
+<p:sld xmlns:a="http://schemas.openxmlformats.org/drawingml/2006/main" xmlns:r="http://schemas.openxmlformats.org/officeDocument/2006/relationships" xmlns:p="http://schemas.openxmlformats.org/presentationml/2006/main">
+  <p:cSld>
+    <p:spTree>
+      <p:nvGrpSpPr>
+        <p:cNvPr id="1" name=""/>
+        <p:cNvGrpSpPr/>
+        <p:nvPr/>
+      </p:nvGrpSpPr>
+      <p:grpSpPr>
+        <a:xfrm>
+          <a:off x="0" y="0"/>
+          <a:ext cx="0" cy="0"/>
+          <a:chOff x="0" y="0"/>
+          <a:chExt cx="0" cy="0"/>
+        </a:xfrm>
+      </p:grpSpPr>
+      <p:sp>
+        <p:nvSpPr>
+          <p:cNvPr id="7" name="순서도: 문서 6">
+            <a:extLst>
+              <a:ext uri="{FF2B5EF4-FFF2-40B4-BE49-F238E27FC236}">
+                <a16:creationId xmlns:a16="http://schemas.microsoft.com/office/drawing/2014/main" id="{1D5FA811-B9CE-4A68-81BF-559D2F683197}"/>
+              </a:ext>
+            </a:extLst>
+          </p:cNvPr>
+          <p:cNvSpPr/>
+          <p:nvPr/>
+        </p:nvSpPr>
+        <p:spPr>
+          <a:xfrm>
+            <a:off x="114298" y="2857500"/>
+            <a:ext cx="1197864" cy="521208"/>
+          </a:xfrm>
+          <a:prstGeom prst="flowChartDocument">
+            <a:avLst/>
+          </a:prstGeom>
+          <a:solidFill>
+            <a:schemeClr val="accent2">
+              <a:lumMod val="20000"/>
+              <a:lumOff val="80000"/>
+            </a:schemeClr>
+          </a:solidFill>
+          <a:ln>
+            <a:solidFill>
+              <a:schemeClr val="tx1"/>
+            </a:solidFill>
+          </a:ln>
+        </p:spPr>
+        <p:style>
+          <a:lnRef idx="2">
+            <a:schemeClr val="accent1">
+              <a:shade val="50000"/>
+            </a:schemeClr>
+          </a:lnRef>
+          <a:fillRef idx="1">
+            <a:schemeClr val="accent1"/>
+          </a:fillRef>
+          <a:effectRef idx="0">
+            <a:schemeClr val="accent1"/>
+          </a:effectRef>
+          <a:fontRef idx="minor">
+            <a:schemeClr val="lt1"/>
+          </a:fontRef>
+        </p:style>
+        <p:txBody>
+          <a:bodyPr rtlCol="0" anchor="ctr"/>
+          <a:lstStyle/>
+          <a:p>
+            <a:pPr algn="ctr"/>
+            <a:r>
+              <a:rPr lang="en-US" altLang="ko-KR" sz="1200" dirty="0">
+                <a:solidFill>
+                  <a:schemeClr val="tx1"/>
+                </a:solidFill>
+                <a:latin typeface="Arial Rounded MT Bold" panose="020F0704030504030204" pitchFamily="34" charset="0"/>
+              </a:rPr>
+              <a:t>User Query</a:t>
+            </a:r>
+            <a:endParaRPr lang="ko-KR" altLang="en-US" sz="1200" dirty="0">
+              <a:solidFill>
+                <a:schemeClr val="tx1"/>
+              </a:solidFill>
+              <a:latin typeface="Arial Rounded MT Bold" panose="020F0704030504030204" pitchFamily="34" charset="0"/>
+            </a:endParaRPr>
+          </a:p>
+        </p:txBody>
+      </p:sp>
+      <p:sp>
+        <p:nvSpPr>
+          <p:cNvPr id="8" name="사각형: 둥근 모서리 7">
+            <a:extLst>
+              <a:ext uri="{FF2B5EF4-FFF2-40B4-BE49-F238E27FC236}">
+                <a16:creationId xmlns:a16="http://schemas.microsoft.com/office/drawing/2014/main" id="{C4B30D98-C498-4BAB-84D1-31A3E7063DE7}"/>
+              </a:ext>
+            </a:extLst>
+          </p:cNvPr>
+          <p:cNvSpPr/>
+          <p:nvPr/>
+        </p:nvSpPr>
+        <p:spPr>
+          <a:xfrm>
+            <a:off x="1497328" y="2845852"/>
+            <a:ext cx="1197864" cy="544068"/>
+          </a:xfrm>
+          <a:prstGeom prst="roundRect">
+            <a:avLst/>
+          </a:prstGeom>
+          <a:solidFill>
+            <a:srgbClr val="FFCC66"/>
+          </a:solidFill>
+          <a:ln>
+            <a:solidFill>
+              <a:schemeClr val="tx1"/>
+            </a:solidFill>
+          </a:ln>
+        </p:spPr>
+        <p:style>
+          <a:lnRef idx="2">
+            <a:schemeClr val="accent1">
+              <a:shade val="50000"/>
+            </a:schemeClr>
+          </a:lnRef>
+          <a:fillRef idx="1">
+            <a:schemeClr val="accent1"/>
+          </a:fillRef>
+          <a:effectRef idx="0">
+            <a:schemeClr val="accent1"/>
+          </a:effectRef>
+          <a:fontRef idx="minor">
+            <a:schemeClr val="lt1"/>
+          </a:fontRef>
+        </p:style>
+        <p:txBody>
+          <a:bodyPr rtlCol="0" anchor="ctr"/>
+          <a:lstStyle/>
+          <a:p>
+            <a:pPr algn="ctr"/>
+            <a:r>
+              <a:rPr lang="en-US" altLang="ko-KR" sz="700" dirty="0">
+                <a:solidFill>
+                  <a:schemeClr val="tx1"/>
+                </a:solidFill>
+                <a:latin typeface="Arial Rounded MT Bold" panose="020F0704030504030204" pitchFamily="34" charset="0"/>
+              </a:rPr>
+              <a:t>Query Re-writing</a:t>
+            </a:r>
+          </a:p>
+          <a:p>
+            <a:pPr algn="ctr"/>
+            <a:r>
+              <a:rPr lang="en-US" altLang="ko-KR" sz="700" dirty="0">
+                <a:solidFill>
+                  <a:schemeClr val="tx1"/>
+                </a:solidFill>
+                <a:latin typeface="Arial Rounded MT Bold" panose="020F0704030504030204" pitchFamily="34" charset="0"/>
+              </a:rPr>
+              <a:t>&amp;</a:t>
+            </a:r>
+          </a:p>
+          <a:p>
+            <a:pPr algn="ctr"/>
+            <a:r>
+              <a:rPr lang="en-US" altLang="ko-KR" sz="700" dirty="0">
+                <a:solidFill>
+                  <a:schemeClr val="tx1"/>
+                </a:solidFill>
+                <a:latin typeface="Arial Rounded MT Bold" panose="020F0704030504030204" pitchFamily="34" charset="0"/>
+              </a:rPr>
+              <a:t>Intent Classification</a:t>
+            </a:r>
+          </a:p>
+        </p:txBody>
+      </p:sp>
+      <p:sp>
+        <p:nvSpPr>
+          <p:cNvPr id="12" name="순서도: 문서 11">
+            <a:extLst>
+              <a:ext uri="{FF2B5EF4-FFF2-40B4-BE49-F238E27FC236}">
+                <a16:creationId xmlns:a16="http://schemas.microsoft.com/office/drawing/2014/main" id="{81BFC99E-71A5-496B-854C-0A6BAED7D61D}"/>
+              </a:ext>
+            </a:extLst>
+          </p:cNvPr>
+          <p:cNvSpPr/>
+          <p:nvPr/>
+        </p:nvSpPr>
+        <p:spPr>
+          <a:xfrm>
+            <a:off x="2869750" y="2857500"/>
+            <a:ext cx="1197864" cy="521208"/>
+          </a:xfrm>
+          <a:prstGeom prst="flowChartDocument">
+            <a:avLst/>
+          </a:prstGeom>
+          <a:solidFill>
+            <a:schemeClr val="accent2">
+              <a:lumMod val="20000"/>
+              <a:lumOff val="80000"/>
+            </a:schemeClr>
+          </a:solidFill>
+          <a:ln>
+            <a:solidFill>
+              <a:schemeClr val="tx1"/>
+            </a:solidFill>
+          </a:ln>
+        </p:spPr>
+        <p:style>
+          <a:lnRef idx="2">
+            <a:schemeClr val="accent1">
+              <a:shade val="50000"/>
+            </a:schemeClr>
+          </a:lnRef>
+          <a:fillRef idx="1">
+            <a:schemeClr val="accent1"/>
+          </a:fillRef>
+          <a:effectRef idx="0">
+            <a:schemeClr val="accent1"/>
+          </a:effectRef>
+          <a:fontRef idx="minor">
+            <a:schemeClr val="lt1"/>
+          </a:fontRef>
+        </p:style>
+        <p:txBody>
+          <a:bodyPr rtlCol="0" anchor="ctr"/>
+          <a:lstStyle/>
+          <a:p>
+            <a:pPr algn="ctr"/>
+            <a:r>
+              <a:rPr lang="en-US" altLang="ko-KR" sz="1200" dirty="0">
+                <a:solidFill>
+                  <a:schemeClr val="tx1"/>
+                </a:solidFill>
+                <a:latin typeface="Arial Rounded MT Bold" panose="020F0704030504030204" pitchFamily="34" charset="0"/>
+              </a:rPr>
+              <a:t>Re-written </a:t>
+            </a:r>
+          </a:p>
+          <a:p>
+            <a:pPr algn="ctr"/>
+            <a:r>
+              <a:rPr lang="en-US" altLang="ko-KR" sz="1200" dirty="0">
+                <a:solidFill>
+                  <a:schemeClr val="tx1"/>
+                </a:solidFill>
+                <a:latin typeface="Arial Rounded MT Bold" panose="020F0704030504030204" pitchFamily="34" charset="0"/>
+              </a:rPr>
+              <a:t>Query</a:t>
+            </a:r>
+            <a:endParaRPr lang="ko-KR" altLang="en-US" sz="1200" dirty="0">
+              <a:solidFill>
+                <a:schemeClr val="tx1"/>
+              </a:solidFill>
+              <a:latin typeface="Arial Rounded MT Bold" panose="020F0704030504030204" pitchFamily="34" charset="0"/>
+            </a:endParaRPr>
+          </a:p>
+        </p:txBody>
+      </p:sp>
+      <p:sp>
+        <p:nvSpPr>
+          <p:cNvPr id="26" name="순서도: 자기 디스크 25">
+            <a:extLst>
+              <a:ext uri="{FF2B5EF4-FFF2-40B4-BE49-F238E27FC236}">
+                <a16:creationId xmlns:a16="http://schemas.microsoft.com/office/drawing/2014/main" id="{E6B8FA6A-5EE4-49AC-9758-1470308B94B9}"/>
+              </a:ext>
+            </a:extLst>
+          </p:cNvPr>
+          <p:cNvSpPr/>
+          <p:nvPr/>
+        </p:nvSpPr>
+        <p:spPr>
+          <a:xfrm>
+            <a:off x="2759517" y="3756831"/>
+            <a:ext cx="1197864" cy="521208"/>
+          </a:xfrm>
+          <a:prstGeom prst="flowChartMagneticDisk">
+            <a:avLst/>
+          </a:prstGeom>
+          <a:solidFill>
+            <a:schemeClr val="accent6">
+              <a:lumMod val="40000"/>
+              <a:lumOff val="60000"/>
+            </a:schemeClr>
+          </a:solidFill>
+          <a:ln>
+            <a:solidFill>
+              <a:schemeClr val="tx1"/>
+            </a:solidFill>
+          </a:ln>
+        </p:spPr>
+        <p:style>
+          <a:lnRef idx="2">
+            <a:schemeClr val="accent1">
+              <a:shade val="50000"/>
+            </a:schemeClr>
+          </a:lnRef>
+          <a:fillRef idx="1">
+            <a:schemeClr val="accent1"/>
+          </a:fillRef>
+          <a:effectRef idx="0">
+            <a:schemeClr val="accent1"/>
+          </a:effectRef>
+          <a:fontRef idx="minor">
+            <a:schemeClr val="lt1"/>
+          </a:fontRef>
+        </p:style>
+        <p:txBody>
+          <a:bodyPr rtlCol="0" anchor="ctr"/>
+          <a:lstStyle/>
+          <a:p>
+            <a:pPr algn="ctr"/>
+            <a:r>
+              <a:rPr lang="en-US" altLang="ko-KR" sz="1100" dirty="0">
+                <a:solidFill>
+                  <a:schemeClr val="tx1"/>
+                </a:solidFill>
+                <a:latin typeface="Arial Rounded MT Bold" panose="020F0704030504030204" pitchFamily="34" charset="0"/>
+              </a:rPr>
+              <a:t>Resolution Vector DB</a:t>
+            </a:r>
+            <a:endParaRPr lang="ko-KR" altLang="en-US" sz="1100" dirty="0"/>
+          </a:p>
+        </p:txBody>
+      </p:sp>
+      <p:sp>
+        <p:nvSpPr>
+          <p:cNvPr id="27" name="순서도: 자기 디스크 26">
+            <a:extLst>
+              <a:ext uri="{FF2B5EF4-FFF2-40B4-BE49-F238E27FC236}">
+                <a16:creationId xmlns:a16="http://schemas.microsoft.com/office/drawing/2014/main" id="{3BF2F7DA-815F-4A9D-BA27-B4A59354A808}"/>
+              </a:ext>
+            </a:extLst>
+          </p:cNvPr>
+          <p:cNvSpPr/>
+          <p:nvPr/>
+        </p:nvSpPr>
+        <p:spPr>
+          <a:xfrm>
+            <a:off x="2759517" y="4444100"/>
+            <a:ext cx="1197864" cy="521208"/>
+          </a:xfrm>
+          <a:prstGeom prst="flowChartMagneticDisk">
+            <a:avLst/>
+          </a:prstGeom>
+          <a:solidFill>
+            <a:schemeClr val="accent6">
+              <a:lumMod val="40000"/>
+              <a:lumOff val="60000"/>
+            </a:schemeClr>
+          </a:solidFill>
+          <a:ln>
+            <a:solidFill>
+              <a:schemeClr val="tx1"/>
+            </a:solidFill>
+          </a:ln>
+        </p:spPr>
+        <p:style>
+          <a:lnRef idx="2">
+            <a:schemeClr val="accent1">
+              <a:shade val="50000"/>
+            </a:schemeClr>
+          </a:lnRef>
+          <a:fillRef idx="1">
+            <a:schemeClr val="accent1"/>
+          </a:fillRef>
+          <a:effectRef idx="0">
+            <a:schemeClr val="accent1"/>
+          </a:effectRef>
+          <a:fontRef idx="minor">
+            <a:schemeClr val="lt1"/>
+          </a:fontRef>
+        </p:style>
+        <p:txBody>
+          <a:bodyPr rtlCol="0" anchor="ctr"/>
+          <a:lstStyle/>
+          <a:p>
+            <a:pPr algn="ctr"/>
+            <a:r>
+              <a:rPr lang="en-US" altLang="ko-KR" sz="1100" dirty="0">
+                <a:solidFill>
+                  <a:schemeClr val="tx1"/>
+                </a:solidFill>
+                <a:latin typeface="Arial Rounded MT Bold" panose="020F0704030504030204" pitchFamily="34" charset="0"/>
+              </a:rPr>
+              <a:t>User Scenario</a:t>
+            </a:r>
+          </a:p>
+          <a:p>
+            <a:pPr algn="ctr"/>
+            <a:r>
+              <a:rPr lang="en-US" altLang="ko-KR" sz="1100" dirty="0">
+                <a:solidFill>
+                  <a:schemeClr val="tx1"/>
+                </a:solidFill>
+                <a:latin typeface="Arial Rounded MT Bold" panose="020F0704030504030204" pitchFamily="34" charset="0"/>
+              </a:rPr>
+              <a:t>Vector DB</a:t>
+            </a:r>
+            <a:endParaRPr lang="ko-KR" altLang="en-US" sz="1100" dirty="0"/>
+          </a:p>
+        </p:txBody>
+      </p:sp>
+      <p:sp>
+        <p:nvSpPr>
+          <p:cNvPr id="32" name="사각형: 둥근 모서리 31">
+            <a:extLst>
+              <a:ext uri="{FF2B5EF4-FFF2-40B4-BE49-F238E27FC236}">
+                <a16:creationId xmlns:a16="http://schemas.microsoft.com/office/drawing/2014/main" id="{D1FA927B-0CAF-45A9-A496-78B6D57D028D}"/>
+              </a:ext>
+            </a:extLst>
+          </p:cNvPr>
+          <p:cNvSpPr/>
+          <p:nvPr/>
+        </p:nvSpPr>
+        <p:spPr>
+          <a:xfrm>
+            <a:off x="7808285" y="3615407"/>
+            <a:ext cx="1197864" cy="621792"/>
+          </a:xfrm>
+          <a:prstGeom prst="roundRect">
+            <a:avLst/>
+          </a:prstGeom>
+          <a:solidFill>
+            <a:srgbClr val="FFCC66"/>
+          </a:solidFill>
+          <a:ln>
+            <a:solidFill>
+              <a:schemeClr val="tx1"/>
+            </a:solidFill>
+          </a:ln>
+        </p:spPr>
+        <p:style>
+          <a:lnRef idx="2">
+            <a:schemeClr val="accent1">
+              <a:shade val="50000"/>
+            </a:schemeClr>
+          </a:lnRef>
+          <a:fillRef idx="1">
+            <a:schemeClr val="accent1"/>
+          </a:fillRef>
+          <a:effectRef idx="0">
+            <a:schemeClr val="accent1"/>
+          </a:effectRef>
+          <a:fontRef idx="minor">
+            <a:schemeClr val="lt1"/>
+          </a:fontRef>
+        </p:style>
+        <p:txBody>
+          <a:bodyPr rtlCol="0" anchor="ctr"/>
+          <a:lstStyle/>
+          <a:p>
+            <a:pPr algn="ctr"/>
+            <a:r>
+              <a:rPr lang="en-US" altLang="ko-KR" sz="1050" dirty="0">
+                <a:solidFill>
+                  <a:schemeClr val="tx1"/>
+                </a:solidFill>
+                <a:latin typeface="Arial Rounded MT Bold" panose="020F0704030504030204" pitchFamily="34" charset="0"/>
+              </a:rPr>
+              <a:t>Ontology-aware</a:t>
+            </a:r>
+          </a:p>
+          <a:p>
+            <a:pPr algn="ctr"/>
+            <a:r>
+              <a:rPr lang="en-US" altLang="ko-KR" sz="1050" dirty="0">
+                <a:solidFill>
+                  <a:schemeClr val="tx1"/>
+                </a:solidFill>
+                <a:latin typeface="Arial Rounded MT Bold" panose="020F0704030504030204" pitchFamily="34" charset="0"/>
+              </a:rPr>
+              <a:t>Re-Ranking</a:t>
+            </a:r>
+            <a:endParaRPr lang="ko-KR" altLang="en-US" sz="1050" dirty="0">
+              <a:solidFill>
+                <a:schemeClr val="tx1"/>
+              </a:solidFill>
+              <a:latin typeface="Arial Rounded MT Bold" panose="020F0704030504030204" pitchFamily="34" charset="0"/>
+            </a:endParaRPr>
+          </a:p>
+        </p:txBody>
+      </p:sp>
+      <p:sp>
+        <p:nvSpPr>
+          <p:cNvPr id="39" name="사각형: 둥근 모서리 38">
+            <a:extLst>
+              <a:ext uri="{FF2B5EF4-FFF2-40B4-BE49-F238E27FC236}">
+                <a16:creationId xmlns:a16="http://schemas.microsoft.com/office/drawing/2014/main" id="{CB3BA162-6259-4353-8BCE-0DCD697DABF7}"/>
+              </a:ext>
+            </a:extLst>
+          </p:cNvPr>
+          <p:cNvSpPr/>
+          <p:nvPr/>
+        </p:nvSpPr>
+        <p:spPr>
+          <a:xfrm>
+            <a:off x="7818122" y="4336776"/>
+            <a:ext cx="1197864" cy="621792"/>
+          </a:xfrm>
+          <a:prstGeom prst="roundRect">
+            <a:avLst/>
+          </a:prstGeom>
+          <a:solidFill>
+            <a:srgbClr val="FFCC66"/>
+          </a:solidFill>
+          <a:ln>
+            <a:solidFill>
+              <a:schemeClr val="tx1"/>
+            </a:solidFill>
+          </a:ln>
+        </p:spPr>
+        <p:style>
+          <a:lnRef idx="2">
+            <a:schemeClr val="accent1">
+              <a:shade val="50000"/>
+            </a:schemeClr>
+          </a:lnRef>
+          <a:fillRef idx="1">
+            <a:schemeClr val="accent1"/>
+          </a:fillRef>
+          <a:effectRef idx="0">
+            <a:schemeClr val="accent1"/>
+          </a:effectRef>
+          <a:fontRef idx="minor">
+            <a:schemeClr val="lt1"/>
+          </a:fontRef>
+        </p:style>
+        <p:txBody>
+          <a:bodyPr rtlCol="0" anchor="ctr"/>
+          <a:lstStyle/>
+          <a:p>
+            <a:pPr algn="ctr"/>
+            <a:r>
+              <a:rPr lang="en-US" altLang="ko-KR" sz="1050" dirty="0">
+                <a:solidFill>
+                  <a:schemeClr val="tx1"/>
+                </a:solidFill>
+                <a:latin typeface="Arial Rounded MT Bold" panose="020F0704030504030204" pitchFamily="34" charset="0"/>
+              </a:rPr>
+              <a:t>Relevance</a:t>
+            </a:r>
+          </a:p>
+          <a:p>
+            <a:pPr algn="ctr"/>
+            <a:r>
+              <a:rPr lang="en-US" altLang="ko-KR" sz="1050" dirty="0">
+                <a:solidFill>
+                  <a:schemeClr val="tx1"/>
+                </a:solidFill>
+                <a:latin typeface="Arial Rounded MT Bold" panose="020F0704030504030204" pitchFamily="34" charset="0"/>
+              </a:rPr>
+              <a:t>Filtering</a:t>
+            </a:r>
+            <a:endParaRPr lang="ko-KR" altLang="en-US" sz="1050" dirty="0">
+              <a:solidFill>
+                <a:schemeClr val="tx1"/>
+              </a:solidFill>
+              <a:latin typeface="Arial Rounded MT Bold" panose="020F0704030504030204" pitchFamily="34" charset="0"/>
+            </a:endParaRPr>
+          </a:p>
+        </p:txBody>
+      </p:sp>
+      <p:sp>
+        <p:nvSpPr>
+          <p:cNvPr id="41" name="사각형: 둥근 모서리 40">
+            <a:extLst>
+              <a:ext uri="{FF2B5EF4-FFF2-40B4-BE49-F238E27FC236}">
+                <a16:creationId xmlns:a16="http://schemas.microsoft.com/office/drawing/2014/main" id="{194DA81A-8866-4623-A306-265EB9ECF491}"/>
+              </a:ext>
+            </a:extLst>
+          </p:cNvPr>
+          <p:cNvSpPr/>
+          <p:nvPr/>
+        </p:nvSpPr>
+        <p:spPr>
+          <a:xfrm>
+            <a:off x="9287124" y="2516532"/>
+            <a:ext cx="1466850" cy="766879"/>
+          </a:xfrm>
+          <a:prstGeom prst="roundRect">
+            <a:avLst/>
+          </a:prstGeom>
+          <a:solidFill>
+            <a:srgbClr val="FFCC66"/>
+          </a:solidFill>
+          <a:ln>
+            <a:solidFill>
+              <a:schemeClr val="tx1"/>
+            </a:solidFill>
+          </a:ln>
+        </p:spPr>
+        <p:style>
+          <a:lnRef idx="2">
+            <a:schemeClr val="accent1">
+              <a:shade val="50000"/>
+            </a:schemeClr>
+          </a:lnRef>
+          <a:fillRef idx="1">
+            <a:schemeClr val="accent1"/>
+          </a:fillRef>
+          <a:effectRef idx="0">
+            <a:schemeClr val="accent1"/>
+          </a:effectRef>
+          <a:fontRef idx="minor">
+            <a:schemeClr val="lt1"/>
+          </a:fontRef>
+        </p:style>
+        <p:txBody>
+          <a:bodyPr rtlCol="0" anchor="ctr"/>
+          <a:lstStyle/>
+          <a:p>
+            <a:pPr algn="ctr"/>
+            <a:r>
+              <a:rPr lang="en-US" altLang="ko-KR" sz="1050" dirty="0">
+                <a:solidFill>
+                  <a:schemeClr val="tx1"/>
+                </a:solidFill>
+                <a:latin typeface="Arial Rounded MT Bold" panose="020F0704030504030204" pitchFamily="34" charset="0"/>
+              </a:rPr>
+              <a:t>Structured Context Merge </a:t>
+            </a:r>
+          </a:p>
+          <a:p>
+            <a:pPr algn="ctr"/>
+            <a:r>
+              <a:rPr lang="en-US" altLang="ko-KR" sz="1050" dirty="0">
+                <a:solidFill>
+                  <a:schemeClr val="tx1"/>
+                </a:solidFill>
+                <a:latin typeface="Arial Rounded MT Bold" panose="020F0704030504030204" pitchFamily="34" charset="0"/>
+              </a:rPr>
+              <a:t>&amp;</a:t>
+            </a:r>
+          </a:p>
+          <a:p>
+            <a:pPr algn="ctr"/>
+            <a:r>
+              <a:rPr lang="en-US" altLang="ko-KR" sz="1050" dirty="0">
+                <a:solidFill>
+                  <a:schemeClr val="tx1"/>
+                </a:solidFill>
+                <a:latin typeface="Arial Rounded MT Bold" panose="020F0704030504030204" pitchFamily="34" charset="0"/>
+              </a:rPr>
+              <a:t>Answer Generation</a:t>
+            </a:r>
+            <a:endParaRPr lang="ko-KR" altLang="en-US" sz="1050" dirty="0">
+              <a:solidFill>
+                <a:schemeClr val="tx1"/>
+              </a:solidFill>
+              <a:latin typeface="Arial Rounded MT Bold" panose="020F0704030504030204" pitchFamily="34" charset="0"/>
+            </a:endParaRPr>
+          </a:p>
+        </p:txBody>
+      </p:sp>
+      <p:sp>
+        <p:nvSpPr>
+          <p:cNvPr id="43" name="직사각형 42">
+            <a:extLst>
+              <a:ext uri="{FF2B5EF4-FFF2-40B4-BE49-F238E27FC236}">
+                <a16:creationId xmlns:a16="http://schemas.microsoft.com/office/drawing/2014/main" id="{4ACD17F0-D7C0-4E39-9B6A-01E6EF77393D}"/>
+              </a:ext>
+            </a:extLst>
+          </p:cNvPr>
+          <p:cNvSpPr/>
+          <p:nvPr/>
+        </p:nvSpPr>
+        <p:spPr>
+          <a:xfrm>
+            <a:off x="7751709" y="3500872"/>
+            <a:ext cx="1304920" cy="1587496"/>
+          </a:xfrm>
+          <a:prstGeom prst="rect">
+            <a:avLst/>
+          </a:prstGeom>
+          <a:noFill/>
+          <a:ln>
+            <a:solidFill>
+              <a:schemeClr val="tx1"/>
+            </a:solidFill>
+            <a:prstDash val="dash"/>
+          </a:ln>
+        </p:spPr>
+        <p:style>
+          <a:lnRef idx="2">
+            <a:schemeClr val="accent1">
+              <a:shade val="50000"/>
+            </a:schemeClr>
+          </a:lnRef>
+          <a:fillRef idx="1">
+            <a:schemeClr val="accent1"/>
+          </a:fillRef>
+          <a:effectRef idx="0">
+            <a:schemeClr val="accent1"/>
+          </a:effectRef>
+          <a:fontRef idx="minor">
+            <a:schemeClr val="lt1"/>
+          </a:fontRef>
+        </p:style>
+        <p:txBody>
+          <a:bodyPr rtlCol="0" anchor="ctr"/>
+          <a:lstStyle/>
+          <a:p>
+            <a:pPr algn="ctr"/>
+            <a:endParaRPr lang="ko-KR" altLang="en-US"/>
+          </a:p>
+        </p:txBody>
+      </p:sp>
+      <p:cxnSp>
+        <p:nvCxnSpPr>
+          <p:cNvPr id="45" name="직선 화살표 연결선 44">
+            <a:extLst>
+              <a:ext uri="{FF2B5EF4-FFF2-40B4-BE49-F238E27FC236}">
+                <a16:creationId xmlns:a16="http://schemas.microsoft.com/office/drawing/2014/main" id="{70668C0A-F8CD-4514-BF3A-291762033710}"/>
+              </a:ext>
+            </a:extLst>
+          </p:cNvPr>
+          <p:cNvCxnSpPr>
+            <a:cxnSpLocks/>
+            <a:stCxn id="7" idx="3"/>
+            <a:endCxn id="8" idx="1"/>
+          </p:cNvCxnSpPr>
+          <p:nvPr/>
+        </p:nvCxnSpPr>
+        <p:spPr>
+          <a:xfrm flipV="1">
+            <a:off x="1312162" y="3117886"/>
+            <a:ext cx="185166" cy="218"/>
+          </a:xfrm>
+          <a:prstGeom prst="straightConnector1">
+            <a:avLst/>
+          </a:prstGeom>
+          <a:ln>
+            <a:tailEnd type="triangle"/>
+          </a:ln>
+        </p:spPr>
+        <p:style>
+          <a:lnRef idx="1">
+            <a:schemeClr val="dk1"/>
+          </a:lnRef>
+          <a:fillRef idx="0">
+            <a:schemeClr val="dk1"/>
+          </a:fillRef>
+          <a:effectRef idx="0">
+            <a:schemeClr val="dk1"/>
+          </a:effectRef>
+          <a:fontRef idx="minor">
+            <a:schemeClr val="tx1"/>
+          </a:fontRef>
+        </p:style>
+      </p:cxnSp>
+      <p:cxnSp>
+        <p:nvCxnSpPr>
+          <p:cNvPr id="47" name="직선 화살표 연결선 46">
+            <a:extLst>
+              <a:ext uri="{FF2B5EF4-FFF2-40B4-BE49-F238E27FC236}">
+                <a16:creationId xmlns:a16="http://schemas.microsoft.com/office/drawing/2014/main" id="{7282D755-6767-49E2-9F79-80794C99720B}"/>
+              </a:ext>
+            </a:extLst>
+          </p:cNvPr>
+          <p:cNvCxnSpPr>
+            <a:cxnSpLocks/>
+            <a:stCxn id="8" idx="3"/>
+            <a:endCxn id="12" idx="1"/>
+          </p:cNvCxnSpPr>
+          <p:nvPr/>
+        </p:nvCxnSpPr>
+        <p:spPr>
+          <a:xfrm>
+            <a:off x="2695192" y="3117886"/>
+            <a:ext cx="174558" cy="218"/>
+          </a:xfrm>
+          <a:prstGeom prst="straightConnector1">
+            <a:avLst/>
+          </a:prstGeom>
+          <a:ln>
+            <a:tailEnd type="triangle"/>
+          </a:ln>
+        </p:spPr>
+        <p:style>
+          <a:lnRef idx="1">
+            <a:schemeClr val="dk1"/>
+          </a:lnRef>
+          <a:fillRef idx="0">
+            <a:schemeClr val="dk1"/>
+          </a:fillRef>
+          <a:effectRef idx="0">
+            <a:schemeClr val="dk1"/>
+          </a:effectRef>
+          <a:fontRef idx="minor">
+            <a:schemeClr val="tx1"/>
+          </a:fontRef>
+        </p:style>
+      </p:cxnSp>
+      <p:sp>
+        <p:nvSpPr>
+          <p:cNvPr id="92" name="두루마리 모양: 가로로 말림 91">
+            <a:extLst>
+              <a:ext uri="{FF2B5EF4-FFF2-40B4-BE49-F238E27FC236}">
+                <a16:creationId xmlns:a16="http://schemas.microsoft.com/office/drawing/2014/main" id="{04CEB55E-5669-42A9-912D-EF060C25A842}"/>
+              </a:ext>
+            </a:extLst>
+          </p:cNvPr>
+          <p:cNvSpPr/>
+          <p:nvPr/>
+        </p:nvSpPr>
+        <p:spPr>
+          <a:xfrm>
+            <a:off x="10959283" y="2523086"/>
+            <a:ext cx="1197864" cy="749553"/>
+          </a:xfrm>
+          <a:prstGeom prst="horizontalScroll">
+            <a:avLst/>
+          </a:prstGeom>
+          <a:solidFill>
+            <a:schemeClr val="accent2">
+              <a:lumMod val="20000"/>
+              <a:lumOff val="80000"/>
+            </a:schemeClr>
+          </a:solidFill>
+          <a:ln>
+            <a:solidFill>
+              <a:schemeClr val="tx1"/>
+            </a:solidFill>
+          </a:ln>
+        </p:spPr>
+        <p:style>
+          <a:lnRef idx="2">
+            <a:schemeClr val="accent1">
+              <a:shade val="50000"/>
+            </a:schemeClr>
+          </a:lnRef>
+          <a:fillRef idx="1">
+            <a:schemeClr val="accent1"/>
+          </a:fillRef>
+          <a:effectRef idx="0">
+            <a:schemeClr val="accent1"/>
+          </a:effectRef>
+          <a:fontRef idx="minor">
+            <a:schemeClr val="lt1"/>
+          </a:fontRef>
+        </p:style>
+        <p:txBody>
+          <a:bodyPr rtlCol="0" anchor="ctr"/>
+          <a:lstStyle/>
+          <a:p>
+            <a:pPr algn="ctr"/>
+            <a:r>
+              <a:rPr lang="en-US" altLang="ko-KR" sz="1200" dirty="0">
+                <a:solidFill>
+                  <a:schemeClr val="tx1"/>
+                </a:solidFill>
+                <a:latin typeface="Arial Rounded MT Bold" panose="020F0704030504030204" pitchFamily="34" charset="0"/>
+              </a:rPr>
+              <a:t>Final </a:t>
+            </a:r>
+          </a:p>
+          <a:p>
+            <a:pPr algn="ctr"/>
+            <a:r>
+              <a:rPr lang="en-US" altLang="ko-KR" sz="1200" dirty="0">
+                <a:solidFill>
+                  <a:schemeClr val="tx1"/>
+                </a:solidFill>
+                <a:latin typeface="Arial Rounded MT Bold" panose="020F0704030504030204" pitchFamily="34" charset="0"/>
+              </a:rPr>
+              <a:t>Answer</a:t>
+            </a:r>
+            <a:endParaRPr lang="ko-KR" altLang="en-US" sz="1200" dirty="0">
+              <a:solidFill>
+                <a:schemeClr val="tx1"/>
+              </a:solidFill>
+              <a:latin typeface="Arial Rounded MT Bold" panose="020F0704030504030204" pitchFamily="34" charset="0"/>
+            </a:endParaRPr>
+          </a:p>
+        </p:txBody>
+      </p:sp>
+      <p:sp>
+        <p:nvSpPr>
+          <p:cNvPr id="95" name="TextBox 94">
+            <a:extLst>
+              <a:ext uri="{FF2B5EF4-FFF2-40B4-BE49-F238E27FC236}">
+                <a16:creationId xmlns:a16="http://schemas.microsoft.com/office/drawing/2014/main" id="{FFD2094F-7B42-40DD-B922-5F1A537A563B}"/>
+              </a:ext>
+            </a:extLst>
+          </p:cNvPr>
+          <p:cNvSpPr txBox="1"/>
+          <p:nvPr/>
+        </p:nvSpPr>
+        <p:spPr>
+          <a:xfrm>
+            <a:off x="376428" y="368300"/>
+            <a:ext cx="3624072" cy="369332"/>
+          </a:xfrm>
+          <a:prstGeom prst="rect">
+            <a:avLst/>
+          </a:prstGeom>
+          <a:noFill/>
+        </p:spPr>
+        <p:txBody>
+          <a:bodyPr wrap="square" rtlCol="0">
+            <a:spAutoFit/>
+          </a:bodyPr>
+          <a:lstStyle/>
+          <a:p>
+            <a:r>
+              <a:rPr lang="ko-KR" altLang="en-US" b="1" dirty="0">
+                <a:highlight>
+                  <a:srgbClr val="00FF00"/>
+                </a:highlight>
+                <a:latin typeface="나눔고딕" panose="020D0604000000000000" pitchFamily="50" charset="-127"/>
+                <a:ea typeface="나눔고딕" panose="020D0604000000000000" pitchFamily="50" charset="-127"/>
+              </a:rPr>
+              <a:t>전체 방법론 도식화</a:t>
+            </a:r>
+            <a:r>
+              <a:rPr lang="en-US" altLang="ko-KR" b="1" dirty="0">
+                <a:highlight>
+                  <a:srgbClr val="00FF00"/>
+                </a:highlight>
+                <a:latin typeface="나눔고딕" panose="020D0604000000000000" pitchFamily="50" charset="-127"/>
+                <a:ea typeface="나눔고딕" panose="020D0604000000000000" pitchFamily="50" charset="-127"/>
+              </a:rPr>
+              <a:t>(Ver. 2)</a:t>
+            </a:r>
+          </a:p>
+        </p:txBody>
+      </p:sp>
+      <p:sp>
+        <p:nvSpPr>
+          <p:cNvPr id="28" name="사각형: 둥근 모서리 27">
+            <a:extLst>
+              <a:ext uri="{FF2B5EF4-FFF2-40B4-BE49-F238E27FC236}">
+                <a16:creationId xmlns:a16="http://schemas.microsoft.com/office/drawing/2014/main" id="{EBDD1BB6-9938-4C58-8618-5C8602735FC2}"/>
+              </a:ext>
+            </a:extLst>
+          </p:cNvPr>
+          <p:cNvSpPr/>
+          <p:nvPr/>
+        </p:nvSpPr>
+        <p:spPr>
+          <a:xfrm>
+            <a:off x="4259458" y="3159187"/>
+            <a:ext cx="1820092" cy="2606613"/>
+          </a:xfrm>
+          <a:prstGeom prst="roundRect">
+            <a:avLst/>
+          </a:prstGeom>
+          <a:noFill/>
+          <a:ln>
+            <a:solidFill>
+              <a:srgbClr val="73AB52"/>
+            </a:solidFill>
+          </a:ln>
+        </p:spPr>
+        <p:style>
+          <a:lnRef idx="2">
+            <a:schemeClr val="accent1">
+              <a:shade val="50000"/>
+            </a:schemeClr>
+          </a:lnRef>
+          <a:fillRef idx="1">
+            <a:schemeClr val="accent1"/>
+          </a:fillRef>
+          <a:effectRef idx="0">
+            <a:schemeClr val="accent1"/>
+          </a:effectRef>
+          <a:fontRef idx="minor">
+            <a:schemeClr val="lt1"/>
+          </a:fontRef>
+        </p:style>
+        <p:txBody>
+          <a:bodyPr rtlCol="0" anchor="ctr"/>
+          <a:lstStyle/>
+          <a:p>
+            <a:pPr algn="ctr"/>
+            <a:endParaRPr lang="ko-KR" altLang="en-US">
+              <a:ln>
+                <a:solidFill>
+                  <a:srgbClr val="71A850"/>
+                </a:solidFill>
+              </a:ln>
+            </a:endParaRPr>
+          </a:p>
+        </p:txBody>
+      </p:sp>
+      <p:sp>
+        <p:nvSpPr>
+          <p:cNvPr id="76" name="TextBox 75">
+            <a:extLst>
+              <a:ext uri="{FF2B5EF4-FFF2-40B4-BE49-F238E27FC236}">
+                <a16:creationId xmlns:a16="http://schemas.microsoft.com/office/drawing/2014/main" id="{F1297B86-0BF9-48C9-AD5A-C3E1D9C31B69}"/>
+              </a:ext>
+            </a:extLst>
+          </p:cNvPr>
+          <p:cNvSpPr txBox="1"/>
+          <p:nvPr/>
+        </p:nvSpPr>
+        <p:spPr>
+          <a:xfrm>
+            <a:off x="4391282" y="3170400"/>
+            <a:ext cx="1542287" cy="461665"/>
+          </a:xfrm>
+          <a:prstGeom prst="rect">
+            <a:avLst/>
+          </a:prstGeom>
+          <a:noFill/>
+        </p:spPr>
+        <p:txBody>
+          <a:bodyPr wrap="square">
+            <a:spAutoFit/>
+          </a:bodyPr>
+          <a:lstStyle/>
+          <a:p>
+            <a:pPr algn="ctr"/>
+            <a:r>
+              <a:rPr lang="en-US" altLang="ko-KR" sz="1200" dirty="0">
+                <a:latin typeface="Arial Rounded MT Bold" panose="020F0704030504030204" pitchFamily="34" charset="0"/>
+                <a:ea typeface="나눔고딕" panose="020D0604000000000000" pitchFamily="50" charset="-127"/>
+              </a:rPr>
+              <a:t>Internal Retrieval</a:t>
+            </a:r>
+          </a:p>
+          <a:p>
+            <a:pPr algn="ctr"/>
+            <a:r>
+              <a:rPr lang="en-US" altLang="ko-KR" sz="1200" dirty="0">
+                <a:latin typeface="Arial Rounded MT Bold" panose="020F0704030504030204" pitchFamily="34" charset="0"/>
+                <a:ea typeface="나눔고딕" panose="020D0604000000000000" pitchFamily="50" charset="-127"/>
+              </a:rPr>
+              <a:t>(BM25 + Dense)</a:t>
+            </a:r>
+          </a:p>
+        </p:txBody>
+      </p:sp>
+      <p:sp>
+        <p:nvSpPr>
+          <p:cNvPr id="46" name="사각형: 둥근 모서리 45">
+            <a:extLst>
+              <a:ext uri="{FF2B5EF4-FFF2-40B4-BE49-F238E27FC236}">
+                <a16:creationId xmlns:a16="http://schemas.microsoft.com/office/drawing/2014/main" id="{7364D3B3-F8D5-484C-8345-070DC456A55E}"/>
+              </a:ext>
+            </a:extLst>
+          </p:cNvPr>
+          <p:cNvSpPr/>
+          <p:nvPr/>
+        </p:nvSpPr>
+        <p:spPr>
+          <a:xfrm>
+            <a:off x="4483156" y="5245782"/>
+            <a:ext cx="1358537" cy="201574"/>
+          </a:xfrm>
+          <a:prstGeom prst="roundRect">
+            <a:avLst/>
+          </a:prstGeom>
+          <a:solidFill>
+            <a:srgbClr val="73AB52"/>
+          </a:solidFill>
+          <a:ln>
+            <a:noFill/>
+          </a:ln>
+        </p:spPr>
+        <p:style>
+          <a:lnRef idx="2">
+            <a:schemeClr val="accent1">
+              <a:shade val="50000"/>
+            </a:schemeClr>
+          </a:lnRef>
+          <a:fillRef idx="1">
+            <a:schemeClr val="accent1"/>
+          </a:fillRef>
+          <a:effectRef idx="0">
+            <a:schemeClr val="accent1"/>
+          </a:effectRef>
+          <a:fontRef idx="minor">
+            <a:schemeClr val="lt1"/>
+          </a:fontRef>
+        </p:style>
+        <p:txBody>
+          <a:bodyPr rtlCol="0" anchor="ctr"/>
+          <a:lstStyle/>
+          <a:p>
+            <a:pPr algn="ctr"/>
+            <a:r>
+              <a:rPr lang="en-US" altLang="ko-KR" sz="1000" b="1" dirty="0">
+                <a:latin typeface="Arial Rounded MT Bold" panose="020F0704030504030204" pitchFamily="34" charset="0"/>
+              </a:rPr>
+              <a:t>Ontology Mapping</a:t>
+            </a:r>
+            <a:endParaRPr lang="ko-KR" altLang="en-US" sz="1000" b="1" dirty="0">
+              <a:latin typeface="Arial Rounded MT Bold" panose="020F0704030504030204" pitchFamily="34" charset="0"/>
+            </a:endParaRPr>
+          </a:p>
+        </p:txBody>
+      </p:sp>
+      <p:sp>
+        <p:nvSpPr>
+          <p:cNvPr id="78" name="사각형: 둥근 모서리 77">
+            <a:extLst>
+              <a:ext uri="{FF2B5EF4-FFF2-40B4-BE49-F238E27FC236}">
+                <a16:creationId xmlns:a16="http://schemas.microsoft.com/office/drawing/2014/main" id="{0249031C-905E-4B15-AADE-0B63AF04FEA6}"/>
+              </a:ext>
+            </a:extLst>
+          </p:cNvPr>
+          <p:cNvSpPr/>
+          <p:nvPr/>
+        </p:nvSpPr>
+        <p:spPr>
+          <a:xfrm>
+            <a:off x="4483156" y="5447356"/>
+            <a:ext cx="1358537" cy="201574"/>
+          </a:xfrm>
+          <a:prstGeom prst="roundRect">
+            <a:avLst/>
+          </a:prstGeom>
+          <a:solidFill>
+            <a:srgbClr val="A3CD89"/>
+          </a:solidFill>
+          <a:ln>
+            <a:noFill/>
+          </a:ln>
+        </p:spPr>
+        <p:style>
+          <a:lnRef idx="2">
+            <a:schemeClr val="accent1">
+              <a:shade val="50000"/>
+            </a:schemeClr>
+          </a:lnRef>
+          <a:fillRef idx="1">
+            <a:schemeClr val="accent1"/>
+          </a:fillRef>
+          <a:effectRef idx="0">
+            <a:schemeClr val="accent1"/>
+          </a:effectRef>
+          <a:fontRef idx="minor">
+            <a:schemeClr val="lt1"/>
+          </a:fontRef>
+        </p:style>
+        <p:txBody>
+          <a:bodyPr rtlCol="0" anchor="ctr"/>
+          <a:lstStyle/>
+          <a:p>
+            <a:pPr algn="ctr"/>
+            <a:r>
+              <a:rPr lang="en-US" altLang="ko-KR" sz="900" dirty="0">
+                <a:solidFill>
+                  <a:schemeClr val="tx1"/>
+                </a:solidFill>
+                <a:latin typeface="Arial Rounded MT Bold" panose="020F0704030504030204" pitchFamily="34" charset="0"/>
+              </a:rPr>
+              <a:t>Relation Analysis</a:t>
+            </a:r>
+            <a:endParaRPr lang="ko-KR" altLang="en-US" sz="900" dirty="0">
+              <a:solidFill>
+                <a:schemeClr val="tx1"/>
+              </a:solidFill>
+              <a:latin typeface="Arial Rounded MT Bold" panose="020F0704030504030204" pitchFamily="34" charset="0"/>
+            </a:endParaRPr>
+          </a:p>
+        </p:txBody>
+      </p:sp>
+      <p:pic>
+        <p:nvPicPr>
+          <p:cNvPr id="25" name="그림 24">
+            <a:extLst>
+              <a:ext uri="{FF2B5EF4-FFF2-40B4-BE49-F238E27FC236}">
+                <a16:creationId xmlns:a16="http://schemas.microsoft.com/office/drawing/2014/main" id="{A4BE52C5-9F47-4455-96C8-6A4B6CB52E93}"/>
+              </a:ext>
+            </a:extLst>
+          </p:cNvPr>
+          <p:cNvPicPr>
+            <a:picLocks noChangeAspect="1"/>
+          </p:cNvPicPr>
+          <p:nvPr/>
+        </p:nvPicPr>
+        <p:blipFill>
+          <a:blip r:embed="rId2"/>
+          <a:stretch>
+            <a:fillRect/>
+          </a:stretch>
+        </p:blipFill>
+        <p:spPr>
+          <a:xfrm>
+            <a:off x="4129440" y="5223787"/>
+            <a:ext cx="369630" cy="369630"/>
+          </a:xfrm>
+          <a:prstGeom prst="rect">
+            <a:avLst/>
+          </a:prstGeom>
+        </p:spPr>
+      </p:pic>
+      <p:sp>
+        <p:nvSpPr>
+          <p:cNvPr id="84" name="사각형: 둥근 모서리 83">
+            <a:extLst>
+              <a:ext uri="{FF2B5EF4-FFF2-40B4-BE49-F238E27FC236}">
+                <a16:creationId xmlns:a16="http://schemas.microsoft.com/office/drawing/2014/main" id="{C2B08194-CEC0-409C-994E-8B3DC4F5DEE7}"/>
+              </a:ext>
+            </a:extLst>
+          </p:cNvPr>
+          <p:cNvSpPr/>
+          <p:nvPr/>
+        </p:nvSpPr>
+        <p:spPr>
+          <a:xfrm>
+            <a:off x="4259458" y="1253998"/>
+            <a:ext cx="1820092" cy="1574321"/>
+          </a:xfrm>
+          <a:prstGeom prst="roundRect">
+            <a:avLst/>
+          </a:prstGeom>
+          <a:noFill/>
+          <a:ln>
+            <a:solidFill>
+              <a:srgbClr val="5683D0"/>
+            </a:solidFill>
+          </a:ln>
+        </p:spPr>
+        <p:style>
+          <a:lnRef idx="2">
+            <a:schemeClr val="accent1">
+              <a:shade val="50000"/>
+            </a:schemeClr>
+          </a:lnRef>
+          <a:fillRef idx="1">
+            <a:schemeClr val="accent1"/>
+          </a:fillRef>
+          <a:effectRef idx="0">
+            <a:schemeClr val="accent1"/>
+          </a:effectRef>
+          <a:fontRef idx="minor">
+            <a:schemeClr val="lt1"/>
+          </a:fontRef>
+        </p:style>
+        <p:txBody>
+          <a:bodyPr rtlCol="0" anchor="ctr"/>
+          <a:lstStyle/>
+          <a:p>
+            <a:pPr algn="ctr"/>
+            <a:endParaRPr lang="ko-KR" altLang="en-US">
+              <a:ln>
+                <a:solidFill>
+                  <a:srgbClr val="71A850"/>
+                </a:solidFill>
+              </a:ln>
+            </a:endParaRPr>
+          </a:p>
+        </p:txBody>
+      </p:sp>
+      <p:sp>
+        <p:nvSpPr>
+          <p:cNvPr id="86" name="TextBox 85">
+            <a:extLst>
+              <a:ext uri="{FF2B5EF4-FFF2-40B4-BE49-F238E27FC236}">
+                <a16:creationId xmlns:a16="http://schemas.microsoft.com/office/drawing/2014/main" id="{CE2FA6D7-6BB2-4EE1-A13B-CF006F488F92}"/>
+              </a:ext>
+            </a:extLst>
+          </p:cNvPr>
+          <p:cNvSpPr txBox="1"/>
+          <p:nvPr/>
+        </p:nvSpPr>
+        <p:spPr>
+          <a:xfrm>
+            <a:off x="4325370" y="1253999"/>
+            <a:ext cx="1688268" cy="461665"/>
+          </a:xfrm>
+          <a:prstGeom prst="rect">
+            <a:avLst/>
+          </a:prstGeom>
+          <a:noFill/>
+        </p:spPr>
+        <p:txBody>
+          <a:bodyPr wrap="square">
+            <a:spAutoFit/>
+          </a:bodyPr>
+          <a:lstStyle/>
+          <a:p>
+            <a:pPr algn="ctr"/>
+            <a:r>
+              <a:rPr lang="en-US" altLang="ko-KR" sz="1200" dirty="0">
+                <a:latin typeface="Arial Rounded MT Bold" panose="020F0704030504030204" pitchFamily="34" charset="0"/>
+                <a:ea typeface="나눔고딕" panose="020D0604000000000000" pitchFamily="50" charset="-127"/>
+              </a:rPr>
+              <a:t>External Knowledge </a:t>
+            </a:r>
+          </a:p>
+          <a:p>
+            <a:pPr algn="ctr"/>
+            <a:r>
+              <a:rPr lang="en-US" altLang="ko-KR" sz="1200" dirty="0">
+                <a:latin typeface="Arial Rounded MT Bold" panose="020F0704030504030204" pitchFamily="34" charset="0"/>
+                <a:ea typeface="나눔고딕" panose="020D0604000000000000" pitchFamily="50" charset="-127"/>
+              </a:rPr>
+              <a:t>(MCP)</a:t>
+            </a:r>
+          </a:p>
+        </p:txBody>
+      </p:sp>
+      <p:sp>
+        <p:nvSpPr>
+          <p:cNvPr id="90" name="사각형: 둥근 모서리 89">
+            <a:extLst>
+              <a:ext uri="{FF2B5EF4-FFF2-40B4-BE49-F238E27FC236}">
+                <a16:creationId xmlns:a16="http://schemas.microsoft.com/office/drawing/2014/main" id="{0C6C0BF9-6FD6-4215-BA75-598863D7FD48}"/>
+              </a:ext>
+            </a:extLst>
+          </p:cNvPr>
+          <p:cNvSpPr/>
+          <p:nvPr/>
+        </p:nvSpPr>
+        <p:spPr>
+          <a:xfrm>
+            <a:off x="4604847" y="1800129"/>
+            <a:ext cx="1358537" cy="252862"/>
+          </a:xfrm>
+          <a:prstGeom prst="roundRect">
+            <a:avLst/>
+          </a:prstGeom>
+          <a:solidFill>
+            <a:srgbClr val="5683D0"/>
+          </a:solidFill>
+          <a:ln>
+            <a:noFill/>
+          </a:ln>
+        </p:spPr>
+        <p:style>
+          <a:lnRef idx="2">
+            <a:schemeClr val="accent1">
+              <a:shade val="50000"/>
+            </a:schemeClr>
+          </a:lnRef>
+          <a:fillRef idx="1">
+            <a:schemeClr val="accent1"/>
+          </a:fillRef>
+          <a:effectRef idx="0">
+            <a:schemeClr val="accent1"/>
+          </a:effectRef>
+          <a:fontRef idx="minor">
+            <a:schemeClr val="lt1"/>
+          </a:fontRef>
+        </p:style>
+        <p:txBody>
+          <a:bodyPr rtlCol="0" anchor="ctr"/>
+          <a:lstStyle/>
+          <a:p>
+            <a:pPr algn="ctr"/>
+            <a:r>
+              <a:rPr lang="ko-KR" altLang="en-US" sz="1000" b="1" dirty="0">
+                <a:latin typeface="나눔고딕" panose="020D0604000000000000" pitchFamily="50" charset="-127"/>
+                <a:ea typeface="나눔고딕" panose="020D0604000000000000" pitchFamily="50" charset="-127"/>
+              </a:rPr>
+              <a:t>법령 정보</a:t>
+            </a:r>
+          </a:p>
+        </p:txBody>
+      </p:sp>
+      <p:pic>
+        <p:nvPicPr>
+          <p:cNvPr id="51" name="그림 50">
+            <a:extLst>
+              <a:ext uri="{FF2B5EF4-FFF2-40B4-BE49-F238E27FC236}">
+                <a16:creationId xmlns:a16="http://schemas.microsoft.com/office/drawing/2014/main" id="{92AAC902-79C3-49B6-8F89-1666A79F2DCA}"/>
+              </a:ext>
+            </a:extLst>
+          </p:cNvPr>
+          <p:cNvPicPr>
+            <a:picLocks noChangeAspect="1"/>
+          </p:cNvPicPr>
+          <p:nvPr/>
+        </p:nvPicPr>
+        <p:blipFill>
+          <a:blip r:embed="rId3">
+            <a:extLst>
+              <a:ext uri="{28A0092B-C50C-407E-A947-70E740481C1C}">
+                <a14:useLocalDpi xmlns:a14="http://schemas.microsoft.com/office/drawing/2010/main" val="0"/>
+              </a:ext>
+            </a:extLst>
+          </a:blip>
+          <a:stretch>
+            <a:fillRect/>
+          </a:stretch>
+        </p:blipFill>
+        <p:spPr>
+          <a:xfrm>
+            <a:off x="4289612" y="1796165"/>
+            <a:ext cx="273881" cy="273881"/>
+          </a:xfrm>
+          <a:prstGeom prst="rect">
+            <a:avLst/>
+          </a:prstGeom>
+        </p:spPr>
+      </p:pic>
+      <p:sp>
+        <p:nvSpPr>
+          <p:cNvPr id="100" name="사각형: 둥근 모서리 99">
+            <a:extLst>
+              <a:ext uri="{FF2B5EF4-FFF2-40B4-BE49-F238E27FC236}">
+                <a16:creationId xmlns:a16="http://schemas.microsoft.com/office/drawing/2014/main" id="{51472EA6-8091-4CCE-9C5E-61445FA9FA88}"/>
+              </a:ext>
+            </a:extLst>
+          </p:cNvPr>
+          <p:cNvSpPr/>
+          <p:nvPr/>
+        </p:nvSpPr>
+        <p:spPr>
+          <a:xfrm>
+            <a:off x="4604847" y="2142322"/>
+            <a:ext cx="1358537" cy="252862"/>
+          </a:xfrm>
+          <a:prstGeom prst="roundRect">
+            <a:avLst/>
+          </a:prstGeom>
+          <a:solidFill>
+            <a:srgbClr val="5683D0"/>
+          </a:solidFill>
+          <a:ln>
+            <a:noFill/>
+          </a:ln>
+        </p:spPr>
+        <p:style>
+          <a:lnRef idx="2">
+            <a:schemeClr val="accent1">
+              <a:shade val="50000"/>
+            </a:schemeClr>
+          </a:lnRef>
+          <a:fillRef idx="1">
+            <a:schemeClr val="accent1"/>
+          </a:fillRef>
+          <a:effectRef idx="0">
+            <a:schemeClr val="accent1"/>
+          </a:effectRef>
+          <a:fontRef idx="minor">
+            <a:schemeClr val="lt1"/>
+          </a:fontRef>
+        </p:style>
+        <p:txBody>
+          <a:bodyPr rtlCol="0" anchor="ctr"/>
+          <a:lstStyle/>
+          <a:p>
+            <a:pPr algn="ctr"/>
+            <a:r>
+              <a:rPr lang="ko-KR" altLang="en-US" sz="1000" b="1" dirty="0">
+                <a:latin typeface="나눔고딕" panose="020D0604000000000000" pitchFamily="50" charset="-127"/>
+                <a:ea typeface="나눔고딕" panose="020D0604000000000000" pitchFamily="50" charset="-127"/>
+              </a:rPr>
+              <a:t>판례 정보</a:t>
+            </a:r>
+          </a:p>
+        </p:txBody>
+      </p:sp>
+      <p:pic>
+        <p:nvPicPr>
+          <p:cNvPr id="101" name="그림 100">
+            <a:extLst>
+              <a:ext uri="{FF2B5EF4-FFF2-40B4-BE49-F238E27FC236}">
+                <a16:creationId xmlns:a16="http://schemas.microsoft.com/office/drawing/2014/main" id="{5C3552FB-A023-4F24-920E-BC98D013E726}"/>
+              </a:ext>
+            </a:extLst>
+          </p:cNvPr>
+          <p:cNvPicPr>
+            <a:picLocks noChangeAspect="1"/>
+          </p:cNvPicPr>
+          <p:nvPr/>
+        </p:nvPicPr>
+        <p:blipFill>
+          <a:blip r:embed="rId3">
+            <a:extLst>
+              <a:ext uri="{28A0092B-C50C-407E-A947-70E740481C1C}">
+                <a14:useLocalDpi xmlns:a14="http://schemas.microsoft.com/office/drawing/2010/main" val="0"/>
+              </a:ext>
+            </a:extLst>
+          </a:blip>
+          <a:stretch>
+            <a:fillRect/>
+          </a:stretch>
+        </p:blipFill>
+        <p:spPr>
+          <a:xfrm>
+            <a:off x="4289612" y="2138358"/>
+            <a:ext cx="273881" cy="273881"/>
+          </a:xfrm>
+          <a:prstGeom prst="rect">
+            <a:avLst/>
+          </a:prstGeom>
+        </p:spPr>
+      </p:pic>
+      <p:sp>
+        <p:nvSpPr>
+          <p:cNvPr id="102" name="사각형: 둥근 모서리 101">
+            <a:extLst>
+              <a:ext uri="{FF2B5EF4-FFF2-40B4-BE49-F238E27FC236}">
+                <a16:creationId xmlns:a16="http://schemas.microsoft.com/office/drawing/2014/main" id="{C7D2DDC6-33B5-4509-92E6-7707F5A4A17E}"/>
+              </a:ext>
+            </a:extLst>
+          </p:cNvPr>
+          <p:cNvSpPr/>
+          <p:nvPr/>
+        </p:nvSpPr>
+        <p:spPr>
+          <a:xfrm>
+            <a:off x="4604847" y="2465882"/>
+            <a:ext cx="1358537" cy="252862"/>
+          </a:xfrm>
+          <a:prstGeom prst="roundRect">
+            <a:avLst/>
+          </a:prstGeom>
+          <a:solidFill>
+            <a:srgbClr val="5683D0"/>
+          </a:solidFill>
+          <a:ln>
+            <a:noFill/>
+          </a:ln>
+        </p:spPr>
+        <p:style>
+          <a:lnRef idx="2">
+            <a:schemeClr val="accent1">
+              <a:shade val="50000"/>
+            </a:schemeClr>
+          </a:lnRef>
+          <a:fillRef idx="1">
+            <a:schemeClr val="accent1"/>
+          </a:fillRef>
+          <a:effectRef idx="0">
+            <a:schemeClr val="accent1"/>
+          </a:effectRef>
+          <a:fontRef idx="minor">
+            <a:schemeClr val="lt1"/>
+          </a:fontRef>
+        </p:style>
+        <p:txBody>
+          <a:bodyPr rtlCol="0" anchor="ctr"/>
+          <a:lstStyle/>
+          <a:p>
+            <a:pPr algn="ctr"/>
+            <a:r>
+              <a:rPr lang="ko-KR" altLang="en-US" sz="1000" b="1" dirty="0" err="1">
+                <a:latin typeface="나눔고딕" panose="020D0604000000000000" pitchFamily="50" charset="-127"/>
+                <a:ea typeface="나눔고딕" panose="020D0604000000000000" pitchFamily="50" charset="-127"/>
+              </a:rPr>
+              <a:t>공정위</a:t>
+            </a:r>
+            <a:r>
+              <a:rPr lang="ko-KR" altLang="en-US" sz="1000" b="1" dirty="0">
+                <a:latin typeface="나눔고딕" panose="020D0604000000000000" pitchFamily="50" charset="-127"/>
+                <a:ea typeface="나눔고딕" panose="020D0604000000000000" pitchFamily="50" charset="-127"/>
+              </a:rPr>
+              <a:t> 자료</a:t>
+            </a:r>
+          </a:p>
+        </p:txBody>
+      </p:sp>
+      <p:pic>
+        <p:nvPicPr>
+          <p:cNvPr id="103" name="그림 102">
+            <a:extLst>
+              <a:ext uri="{FF2B5EF4-FFF2-40B4-BE49-F238E27FC236}">
+                <a16:creationId xmlns:a16="http://schemas.microsoft.com/office/drawing/2014/main" id="{561D62A4-F34C-4AE6-AE94-48369DD8733D}"/>
+              </a:ext>
+            </a:extLst>
+          </p:cNvPr>
+          <p:cNvPicPr>
+            <a:picLocks noChangeAspect="1"/>
+          </p:cNvPicPr>
+          <p:nvPr/>
+        </p:nvPicPr>
+        <p:blipFill>
+          <a:blip r:embed="rId3">
+            <a:extLst>
+              <a:ext uri="{28A0092B-C50C-407E-A947-70E740481C1C}">
+                <a14:useLocalDpi xmlns:a14="http://schemas.microsoft.com/office/drawing/2010/main" val="0"/>
+              </a:ext>
+            </a:extLst>
+          </a:blip>
+          <a:stretch>
+            <a:fillRect/>
+          </a:stretch>
+        </p:blipFill>
+        <p:spPr>
+          <a:xfrm>
+            <a:off x="4289612" y="2461918"/>
+            <a:ext cx="273881" cy="273881"/>
+          </a:xfrm>
+          <a:prstGeom prst="rect">
+            <a:avLst/>
+          </a:prstGeom>
+        </p:spPr>
+      </p:pic>
+      <p:pic>
+        <p:nvPicPr>
+          <p:cNvPr id="104" name="그림 103">
+            <a:extLst>
+              <a:ext uri="{FF2B5EF4-FFF2-40B4-BE49-F238E27FC236}">
+                <a16:creationId xmlns:a16="http://schemas.microsoft.com/office/drawing/2014/main" id="{64A1D49E-9B71-4192-9D60-842D76A2D792}"/>
+              </a:ext>
+            </a:extLst>
+          </p:cNvPr>
+          <p:cNvPicPr>
+            <a:picLocks noChangeAspect="1"/>
+          </p:cNvPicPr>
+          <p:nvPr/>
+        </p:nvPicPr>
+        <p:blipFill>
+          <a:blip r:embed="rId4">
+            <a:extLst>
+              <a:ext uri="{28A0092B-C50C-407E-A947-70E740481C1C}">
+                <a14:useLocalDpi xmlns:a14="http://schemas.microsoft.com/office/drawing/2010/main" val="0"/>
+              </a:ext>
+            </a:extLst>
+          </a:blip>
+          <a:stretch>
+            <a:fillRect/>
+          </a:stretch>
+        </p:blipFill>
+        <p:spPr>
+          <a:xfrm>
+            <a:off x="1510229" y="2600569"/>
+            <a:ext cx="234969" cy="234969"/>
+          </a:xfrm>
+          <a:prstGeom prst="rect">
+            <a:avLst/>
+          </a:prstGeom>
+        </p:spPr>
+      </p:pic>
+      <p:pic>
+        <p:nvPicPr>
+          <p:cNvPr id="105" name="그림 104">
+            <a:extLst>
+              <a:ext uri="{FF2B5EF4-FFF2-40B4-BE49-F238E27FC236}">
+                <a16:creationId xmlns:a16="http://schemas.microsoft.com/office/drawing/2014/main" id="{4C920CE9-2000-4A4E-88C7-C82F5C289F73}"/>
+              </a:ext>
+            </a:extLst>
+          </p:cNvPr>
+          <p:cNvPicPr>
+            <a:picLocks noChangeAspect="1"/>
+          </p:cNvPicPr>
+          <p:nvPr/>
+        </p:nvPicPr>
+        <p:blipFill>
+          <a:blip r:embed="rId4">
+            <a:extLst>
+              <a:ext uri="{28A0092B-C50C-407E-A947-70E740481C1C}">
+                <a14:useLocalDpi xmlns:a14="http://schemas.microsoft.com/office/drawing/2010/main" val="0"/>
+              </a:ext>
+            </a:extLst>
+          </a:blip>
+          <a:stretch>
+            <a:fillRect/>
+          </a:stretch>
+        </p:blipFill>
+        <p:spPr>
+          <a:xfrm>
+            <a:off x="4426552" y="1008031"/>
+            <a:ext cx="234969" cy="234969"/>
+          </a:xfrm>
+          <a:prstGeom prst="rect">
+            <a:avLst/>
+          </a:prstGeom>
+        </p:spPr>
+      </p:pic>
+      <p:grpSp>
+        <p:nvGrpSpPr>
+          <p:cNvPr id="59" name="그룹 58">
+            <a:extLst>
+              <a:ext uri="{FF2B5EF4-FFF2-40B4-BE49-F238E27FC236}">
+                <a16:creationId xmlns:a16="http://schemas.microsoft.com/office/drawing/2014/main" id="{F8FF894A-B040-47F5-A6DA-D6BB451DF261}"/>
+              </a:ext>
+            </a:extLst>
+          </p:cNvPr>
+          <p:cNvGrpSpPr/>
+          <p:nvPr/>
+        </p:nvGrpSpPr>
+        <p:grpSpPr>
+          <a:xfrm>
+            <a:off x="6234872" y="1666361"/>
+            <a:ext cx="1342644" cy="637794"/>
+            <a:chOff x="6296605" y="1809442"/>
+            <a:chExt cx="1342644" cy="637794"/>
+          </a:xfrm>
+          <a:solidFill>
+            <a:schemeClr val="accent2">
+              <a:lumMod val="20000"/>
+              <a:lumOff val="80000"/>
+            </a:schemeClr>
+          </a:solidFill>
+        </p:grpSpPr>
+        <p:sp>
+          <p:nvSpPr>
+            <p:cNvPr id="70" name="순서도: 문서 69">
+              <a:extLst>
+                <a:ext uri="{FF2B5EF4-FFF2-40B4-BE49-F238E27FC236}">
+                  <a16:creationId xmlns:a16="http://schemas.microsoft.com/office/drawing/2014/main" id="{98FA3896-9FEC-4E6D-828D-86B5C38F46AC}"/>
+                </a:ext>
+              </a:extLst>
+            </p:cNvPr>
+            <p:cNvSpPr/>
+            <p:nvPr/>
+          </p:nvSpPr>
+          <p:spPr>
+            <a:xfrm>
+              <a:off x="6441385" y="1809442"/>
+              <a:ext cx="1197864" cy="521208"/>
+            </a:xfrm>
+            <a:prstGeom prst="flowChartDocument">
+              <a:avLst/>
+            </a:prstGeom>
+            <a:grpFill/>
+            <a:ln>
+              <a:solidFill>
+                <a:schemeClr val="tx1"/>
+              </a:solidFill>
+            </a:ln>
+          </p:spPr>
+          <p:style>
+            <a:lnRef idx="2">
+              <a:schemeClr val="accent1">
+                <a:shade val="50000"/>
+              </a:schemeClr>
+            </a:lnRef>
+            <a:fillRef idx="1">
+              <a:schemeClr val="accent1"/>
+            </a:fillRef>
+            <a:effectRef idx="0">
+              <a:schemeClr val="accent1"/>
+            </a:effectRef>
+            <a:fontRef idx="minor">
+              <a:schemeClr val="lt1"/>
+            </a:fontRef>
+          </p:style>
+          <p:txBody>
+            <a:bodyPr rtlCol="0" anchor="ctr"/>
+            <a:lstStyle/>
+            <a:p>
+              <a:pPr algn="ctr"/>
+              <a:r>
+                <a:rPr lang="en-US" altLang="ko-KR" sz="1200" dirty="0">
+                  <a:solidFill>
+                    <a:schemeClr val="tx1"/>
+                  </a:solidFill>
+                  <a:latin typeface="Arial Rounded MT Bold" panose="020F0704030504030204" pitchFamily="34" charset="0"/>
+                </a:rPr>
+                <a:t>Resolution</a:t>
+              </a:r>
+            </a:p>
+            <a:p>
+              <a:pPr algn="ctr"/>
+              <a:r>
+                <a:rPr lang="en-US" altLang="ko-KR" sz="1200" dirty="0">
+                  <a:solidFill>
+                    <a:schemeClr val="tx1"/>
+                  </a:solidFill>
+                  <a:latin typeface="Arial Rounded MT Bold" panose="020F0704030504030204" pitchFamily="34" charset="0"/>
+                </a:rPr>
+                <a:t>Document</a:t>
+              </a:r>
+              <a:endParaRPr lang="ko-KR" altLang="en-US" sz="1200" dirty="0">
+                <a:solidFill>
+                  <a:schemeClr val="tx1"/>
+                </a:solidFill>
+                <a:latin typeface="Arial Rounded MT Bold" panose="020F0704030504030204" pitchFamily="34" charset="0"/>
+              </a:endParaRPr>
+            </a:p>
+          </p:txBody>
+        </p:sp>
+        <p:sp>
+          <p:nvSpPr>
+            <p:cNvPr id="71" name="순서도: 문서 70">
+              <a:extLst>
+                <a:ext uri="{FF2B5EF4-FFF2-40B4-BE49-F238E27FC236}">
+                  <a16:creationId xmlns:a16="http://schemas.microsoft.com/office/drawing/2014/main" id="{040F8336-A9C5-46FC-B02F-D7468E73681B}"/>
+                </a:ext>
+              </a:extLst>
+            </p:cNvPr>
+            <p:cNvSpPr/>
+            <p:nvPr/>
+          </p:nvSpPr>
+          <p:spPr>
+            <a:xfrm>
+              <a:off x="6368995" y="1864306"/>
+              <a:ext cx="1197864" cy="521208"/>
+            </a:xfrm>
+            <a:prstGeom prst="flowChartDocument">
+              <a:avLst/>
+            </a:prstGeom>
+            <a:grpFill/>
+            <a:ln>
+              <a:solidFill>
+                <a:schemeClr val="tx1"/>
+              </a:solidFill>
+            </a:ln>
+          </p:spPr>
+          <p:style>
+            <a:lnRef idx="2">
+              <a:schemeClr val="accent1">
+                <a:shade val="50000"/>
+              </a:schemeClr>
+            </a:lnRef>
+            <a:fillRef idx="1">
+              <a:schemeClr val="accent1"/>
+            </a:fillRef>
+            <a:effectRef idx="0">
+              <a:schemeClr val="accent1"/>
+            </a:effectRef>
+            <a:fontRef idx="minor">
+              <a:schemeClr val="lt1"/>
+            </a:fontRef>
+          </p:style>
+          <p:txBody>
+            <a:bodyPr rtlCol="0" anchor="ctr"/>
+            <a:lstStyle/>
+            <a:p>
+              <a:pPr algn="ctr"/>
+              <a:endParaRPr lang="ko-KR" altLang="en-US" sz="1200" dirty="0">
+                <a:solidFill>
+                  <a:schemeClr val="tx1"/>
+                </a:solidFill>
+                <a:latin typeface="Arial Rounded MT Bold" panose="020F0704030504030204" pitchFamily="34" charset="0"/>
+              </a:endParaRPr>
+            </a:p>
+          </p:txBody>
+        </p:sp>
+        <p:sp>
+          <p:nvSpPr>
+            <p:cNvPr id="72" name="순서도: 문서 71">
+              <a:extLst>
+                <a:ext uri="{FF2B5EF4-FFF2-40B4-BE49-F238E27FC236}">
+                  <a16:creationId xmlns:a16="http://schemas.microsoft.com/office/drawing/2014/main" id="{EF570B42-C800-4DA5-8687-1FD02BEBBC83}"/>
+                </a:ext>
+              </a:extLst>
+            </p:cNvPr>
+            <p:cNvSpPr/>
+            <p:nvPr/>
+          </p:nvSpPr>
+          <p:spPr>
+            <a:xfrm>
+              <a:off x="6296605" y="1926028"/>
+              <a:ext cx="1197864" cy="521208"/>
+            </a:xfrm>
+            <a:prstGeom prst="flowChartDocument">
+              <a:avLst/>
+            </a:prstGeom>
+            <a:grpFill/>
+            <a:ln>
+              <a:solidFill>
+                <a:schemeClr val="tx1"/>
+              </a:solidFill>
+            </a:ln>
+          </p:spPr>
+          <p:style>
+            <a:lnRef idx="2">
+              <a:schemeClr val="accent1">
+                <a:shade val="50000"/>
+              </a:schemeClr>
+            </a:lnRef>
+            <a:fillRef idx="1">
+              <a:schemeClr val="accent1"/>
+            </a:fillRef>
+            <a:effectRef idx="0">
+              <a:schemeClr val="accent1"/>
+            </a:effectRef>
+            <a:fontRef idx="minor">
+              <a:schemeClr val="lt1"/>
+            </a:fontRef>
+          </p:style>
+          <p:txBody>
+            <a:bodyPr rtlCol="0" anchor="ctr"/>
+            <a:lstStyle/>
+            <a:p>
+              <a:pPr algn="ctr"/>
+              <a:r>
+                <a:rPr lang="en-US" altLang="ko-KR" sz="1100" dirty="0">
+                  <a:solidFill>
+                    <a:schemeClr val="tx1"/>
+                  </a:solidFill>
+                  <a:latin typeface="Arial Rounded MT Bold" panose="020F0704030504030204" pitchFamily="34" charset="0"/>
+                </a:rPr>
+                <a:t>External Evidence</a:t>
+              </a:r>
+              <a:endParaRPr lang="ko-KR" altLang="en-US" sz="1100" dirty="0">
+                <a:solidFill>
+                  <a:schemeClr val="tx1"/>
+                </a:solidFill>
+                <a:latin typeface="Arial Rounded MT Bold" panose="020F0704030504030204" pitchFamily="34" charset="0"/>
+              </a:endParaRPr>
+            </a:p>
+          </p:txBody>
+        </p:sp>
+      </p:grpSp>
+      <p:grpSp>
+        <p:nvGrpSpPr>
+          <p:cNvPr id="109" name="그룹 108">
+            <a:extLst>
+              <a:ext uri="{FF2B5EF4-FFF2-40B4-BE49-F238E27FC236}">
+                <a16:creationId xmlns:a16="http://schemas.microsoft.com/office/drawing/2014/main" id="{C037A9CC-AA07-4750-BD82-820DA5F74E45}"/>
+              </a:ext>
+            </a:extLst>
+          </p:cNvPr>
+          <p:cNvGrpSpPr/>
+          <p:nvPr/>
+        </p:nvGrpSpPr>
+        <p:grpSpPr>
+          <a:xfrm>
+            <a:off x="4483923" y="3633773"/>
+            <a:ext cx="1342644" cy="637794"/>
+            <a:chOff x="6296605" y="1809442"/>
+            <a:chExt cx="1342644" cy="637794"/>
+          </a:xfrm>
+          <a:solidFill>
+            <a:schemeClr val="accent2">
+              <a:lumMod val="20000"/>
+              <a:lumOff val="80000"/>
+            </a:schemeClr>
+          </a:solidFill>
+        </p:grpSpPr>
+        <p:sp>
+          <p:nvSpPr>
+            <p:cNvPr id="110" name="순서도: 문서 109">
+              <a:extLst>
+                <a:ext uri="{FF2B5EF4-FFF2-40B4-BE49-F238E27FC236}">
+                  <a16:creationId xmlns:a16="http://schemas.microsoft.com/office/drawing/2014/main" id="{4B5ED781-7630-49A5-B07C-570975B57D4E}"/>
+                </a:ext>
+              </a:extLst>
+            </p:cNvPr>
+            <p:cNvSpPr/>
+            <p:nvPr/>
+          </p:nvSpPr>
+          <p:spPr>
+            <a:xfrm>
+              <a:off x="6441385" y="1809442"/>
+              <a:ext cx="1197864" cy="521208"/>
+            </a:xfrm>
+            <a:prstGeom prst="flowChartDocument">
+              <a:avLst/>
+            </a:prstGeom>
+            <a:grpFill/>
+            <a:ln>
+              <a:solidFill>
+                <a:schemeClr val="tx1"/>
+              </a:solidFill>
+            </a:ln>
+          </p:spPr>
+          <p:style>
+            <a:lnRef idx="2">
+              <a:schemeClr val="accent1">
+                <a:shade val="50000"/>
+              </a:schemeClr>
+            </a:lnRef>
+            <a:fillRef idx="1">
+              <a:schemeClr val="accent1"/>
+            </a:fillRef>
+            <a:effectRef idx="0">
+              <a:schemeClr val="accent1"/>
+            </a:effectRef>
+            <a:fontRef idx="minor">
+              <a:schemeClr val="lt1"/>
+            </a:fontRef>
+          </p:style>
+          <p:txBody>
+            <a:bodyPr rtlCol="0" anchor="ctr"/>
+            <a:lstStyle/>
+            <a:p>
+              <a:pPr algn="ctr"/>
+              <a:r>
+                <a:rPr lang="en-US" altLang="ko-KR" sz="1200" dirty="0">
+                  <a:solidFill>
+                    <a:schemeClr val="tx1"/>
+                  </a:solidFill>
+                  <a:latin typeface="Arial Rounded MT Bold" panose="020F0704030504030204" pitchFamily="34" charset="0"/>
+                </a:rPr>
+                <a:t>Resolution</a:t>
+              </a:r>
+            </a:p>
+            <a:p>
+              <a:pPr algn="ctr"/>
+              <a:r>
+                <a:rPr lang="en-US" altLang="ko-KR" sz="1200" dirty="0">
+                  <a:solidFill>
+                    <a:schemeClr val="tx1"/>
+                  </a:solidFill>
+                  <a:latin typeface="Arial Rounded MT Bold" panose="020F0704030504030204" pitchFamily="34" charset="0"/>
+                </a:rPr>
+                <a:t>Document</a:t>
+              </a:r>
+              <a:endParaRPr lang="ko-KR" altLang="en-US" sz="1200" dirty="0">
+                <a:solidFill>
+                  <a:schemeClr val="tx1"/>
+                </a:solidFill>
+                <a:latin typeface="Arial Rounded MT Bold" panose="020F0704030504030204" pitchFamily="34" charset="0"/>
+              </a:endParaRPr>
+            </a:p>
+          </p:txBody>
+        </p:sp>
+        <p:sp>
+          <p:nvSpPr>
+            <p:cNvPr id="111" name="순서도: 문서 110">
+              <a:extLst>
+                <a:ext uri="{FF2B5EF4-FFF2-40B4-BE49-F238E27FC236}">
+                  <a16:creationId xmlns:a16="http://schemas.microsoft.com/office/drawing/2014/main" id="{4C33A769-0CB0-4061-8104-2FE910D7338E}"/>
+                </a:ext>
+              </a:extLst>
+            </p:cNvPr>
+            <p:cNvSpPr/>
+            <p:nvPr/>
+          </p:nvSpPr>
+          <p:spPr>
+            <a:xfrm>
+              <a:off x="6368995" y="1864306"/>
+              <a:ext cx="1197864" cy="521208"/>
+            </a:xfrm>
+            <a:prstGeom prst="flowChartDocument">
+              <a:avLst/>
+            </a:prstGeom>
+            <a:grpFill/>
+            <a:ln>
+              <a:solidFill>
+                <a:schemeClr val="tx1"/>
+              </a:solidFill>
+            </a:ln>
+          </p:spPr>
+          <p:style>
+            <a:lnRef idx="2">
+              <a:schemeClr val="accent1">
+                <a:shade val="50000"/>
+              </a:schemeClr>
+            </a:lnRef>
+            <a:fillRef idx="1">
+              <a:schemeClr val="accent1"/>
+            </a:fillRef>
+            <a:effectRef idx="0">
+              <a:schemeClr val="accent1"/>
+            </a:effectRef>
+            <a:fontRef idx="minor">
+              <a:schemeClr val="lt1"/>
+            </a:fontRef>
+          </p:style>
+          <p:txBody>
+            <a:bodyPr rtlCol="0" anchor="ctr"/>
+            <a:lstStyle/>
+            <a:p>
+              <a:pPr algn="ctr"/>
+              <a:endParaRPr lang="ko-KR" altLang="en-US" sz="1200" dirty="0">
+                <a:solidFill>
+                  <a:schemeClr val="tx1"/>
+                </a:solidFill>
+                <a:latin typeface="Arial Rounded MT Bold" panose="020F0704030504030204" pitchFamily="34" charset="0"/>
+              </a:endParaRPr>
+            </a:p>
+          </p:txBody>
+        </p:sp>
+        <p:sp>
+          <p:nvSpPr>
+            <p:cNvPr id="112" name="순서도: 문서 111">
+              <a:extLst>
+                <a:ext uri="{FF2B5EF4-FFF2-40B4-BE49-F238E27FC236}">
+                  <a16:creationId xmlns:a16="http://schemas.microsoft.com/office/drawing/2014/main" id="{45EEEC03-634F-41E3-9D4A-F60A508FD5DB}"/>
+                </a:ext>
+              </a:extLst>
+            </p:cNvPr>
+            <p:cNvSpPr/>
+            <p:nvPr/>
+          </p:nvSpPr>
+          <p:spPr>
+            <a:xfrm>
+              <a:off x="6296605" y="1926028"/>
+              <a:ext cx="1197864" cy="521208"/>
+            </a:xfrm>
+            <a:prstGeom prst="flowChartDocument">
+              <a:avLst/>
+            </a:prstGeom>
+            <a:grpFill/>
+            <a:ln>
+              <a:solidFill>
+                <a:schemeClr val="tx1"/>
+              </a:solidFill>
+            </a:ln>
+          </p:spPr>
+          <p:style>
+            <a:lnRef idx="2">
+              <a:schemeClr val="accent1">
+                <a:shade val="50000"/>
+              </a:schemeClr>
+            </a:lnRef>
+            <a:fillRef idx="1">
+              <a:schemeClr val="accent1"/>
+            </a:fillRef>
+            <a:effectRef idx="0">
+              <a:schemeClr val="accent1"/>
+            </a:effectRef>
+            <a:fontRef idx="minor">
+              <a:schemeClr val="lt1"/>
+            </a:fontRef>
+          </p:style>
+          <p:txBody>
+            <a:bodyPr rtlCol="0" anchor="ctr"/>
+            <a:lstStyle/>
+            <a:p>
+              <a:pPr algn="ctr"/>
+              <a:r>
+                <a:rPr lang="en-US" altLang="ko-KR" sz="1100" dirty="0">
+                  <a:solidFill>
+                    <a:schemeClr val="tx1"/>
+                  </a:solidFill>
+                  <a:latin typeface="Arial Rounded MT Bold" panose="020F0704030504030204" pitchFamily="34" charset="0"/>
+                </a:rPr>
+                <a:t>Resolution</a:t>
+              </a:r>
+            </a:p>
+            <a:p>
+              <a:pPr algn="ctr"/>
+              <a:r>
+                <a:rPr lang="en-US" altLang="ko-KR" sz="1100" dirty="0">
+                  <a:solidFill>
+                    <a:schemeClr val="tx1"/>
+                  </a:solidFill>
+                  <a:latin typeface="Arial Rounded MT Bold" panose="020F0704030504030204" pitchFamily="34" charset="0"/>
+                </a:rPr>
+                <a:t>Document</a:t>
+              </a:r>
+              <a:endParaRPr lang="ko-KR" altLang="en-US" sz="1100" dirty="0">
+                <a:solidFill>
+                  <a:schemeClr val="tx1"/>
+                </a:solidFill>
+                <a:latin typeface="Arial Rounded MT Bold" panose="020F0704030504030204" pitchFamily="34" charset="0"/>
+              </a:endParaRPr>
+            </a:p>
+          </p:txBody>
+        </p:sp>
+      </p:grpSp>
+      <p:grpSp>
+        <p:nvGrpSpPr>
+          <p:cNvPr id="113" name="그룹 112">
+            <a:extLst>
+              <a:ext uri="{FF2B5EF4-FFF2-40B4-BE49-F238E27FC236}">
+                <a16:creationId xmlns:a16="http://schemas.microsoft.com/office/drawing/2014/main" id="{8362992B-2A06-4424-B4BE-36B373CE0610}"/>
+              </a:ext>
+            </a:extLst>
+          </p:cNvPr>
+          <p:cNvGrpSpPr/>
+          <p:nvPr/>
+        </p:nvGrpSpPr>
+        <p:grpSpPr>
+          <a:xfrm>
+            <a:off x="4483923" y="4327968"/>
+            <a:ext cx="1342644" cy="637794"/>
+            <a:chOff x="6296605" y="1809442"/>
+            <a:chExt cx="1342644" cy="637794"/>
+          </a:xfrm>
+          <a:solidFill>
+            <a:schemeClr val="accent2">
+              <a:lumMod val="20000"/>
+              <a:lumOff val="80000"/>
+            </a:schemeClr>
+          </a:solidFill>
+        </p:grpSpPr>
+        <p:sp>
+          <p:nvSpPr>
+            <p:cNvPr id="114" name="순서도: 문서 113">
+              <a:extLst>
+                <a:ext uri="{FF2B5EF4-FFF2-40B4-BE49-F238E27FC236}">
+                  <a16:creationId xmlns:a16="http://schemas.microsoft.com/office/drawing/2014/main" id="{A357E6FF-7714-4795-9A9F-5EA36047AD29}"/>
+                </a:ext>
+              </a:extLst>
+            </p:cNvPr>
+            <p:cNvSpPr/>
+            <p:nvPr/>
+          </p:nvSpPr>
+          <p:spPr>
+            <a:xfrm>
+              <a:off x="6441385" y="1809442"/>
+              <a:ext cx="1197864" cy="521208"/>
+            </a:xfrm>
+            <a:prstGeom prst="flowChartDocument">
+              <a:avLst/>
+            </a:prstGeom>
+            <a:grpFill/>
+            <a:ln>
+              <a:solidFill>
+                <a:schemeClr val="tx1"/>
+              </a:solidFill>
+            </a:ln>
+          </p:spPr>
+          <p:style>
+            <a:lnRef idx="2">
+              <a:schemeClr val="accent1">
+                <a:shade val="50000"/>
+              </a:schemeClr>
+            </a:lnRef>
+            <a:fillRef idx="1">
+              <a:schemeClr val="accent1"/>
+            </a:fillRef>
+            <a:effectRef idx="0">
+              <a:schemeClr val="accent1"/>
+            </a:effectRef>
+            <a:fontRef idx="minor">
+              <a:schemeClr val="lt1"/>
+            </a:fontRef>
+          </p:style>
+          <p:txBody>
+            <a:bodyPr rtlCol="0" anchor="ctr"/>
+            <a:lstStyle/>
+            <a:p>
+              <a:pPr algn="ctr"/>
+              <a:r>
+                <a:rPr lang="en-US" altLang="ko-KR" sz="1200" dirty="0">
+                  <a:solidFill>
+                    <a:schemeClr val="tx1"/>
+                  </a:solidFill>
+                  <a:latin typeface="Arial Rounded MT Bold" panose="020F0704030504030204" pitchFamily="34" charset="0"/>
+                </a:rPr>
+                <a:t>Resolution</a:t>
+              </a:r>
+            </a:p>
+            <a:p>
+              <a:pPr algn="ctr"/>
+              <a:r>
+                <a:rPr lang="en-US" altLang="ko-KR" sz="1200" dirty="0">
+                  <a:solidFill>
+                    <a:schemeClr val="tx1"/>
+                  </a:solidFill>
+                  <a:latin typeface="Arial Rounded MT Bold" panose="020F0704030504030204" pitchFamily="34" charset="0"/>
+                </a:rPr>
+                <a:t>Document</a:t>
+              </a:r>
+              <a:endParaRPr lang="ko-KR" altLang="en-US" sz="1200" dirty="0">
+                <a:solidFill>
+                  <a:schemeClr val="tx1"/>
+                </a:solidFill>
+                <a:latin typeface="Arial Rounded MT Bold" panose="020F0704030504030204" pitchFamily="34" charset="0"/>
+              </a:endParaRPr>
+            </a:p>
+          </p:txBody>
+        </p:sp>
+        <p:sp>
+          <p:nvSpPr>
+            <p:cNvPr id="115" name="순서도: 문서 114">
+              <a:extLst>
+                <a:ext uri="{FF2B5EF4-FFF2-40B4-BE49-F238E27FC236}">
+                  <a16:creationId xmlns:a16="http://schemas.microsoft.com/office/drawing/2014/main" id="{7D77341A-773C-49FC-B38D-017225C4C207}"/>
+                </a:ext>
+              </a:extLst>
+            </p:cNvPr>
+            <p:cNvSpPr/>
+            <p:nvPr/>
+          </p:nvSpPr>
+          <p:spPr>
+            <a:xfrm>
+              <a:off x="6368995" y="1864306"/>
+              <a:ext cx="1197864" cy="521208"/>
+            </a:xfrm>
+            <a:prstGeom prst="flowChartDocument">
+              <a:avLst/>
+            </a:prstGeom>
+            <a:grpFill/>
+            <a:ln>
+              <a:solidFill>
+                <a:schemeClr val="tx1"/>
+              </a:solidFill>
+            </a:ln>
+          </p:spPr>
+          <p:style>
+            <a:lnRef idx="2">
+              <a:schemeClr val="accent1">
+                <a:shade val="50000"/>
+              </a:schemeClr>
+            </a:lnRef>
+            <a:fillRef idx="1">
+              <a:schemeClr val="accent1"/>
+            </a:fillRef>
+            <a:effectRef idx="0">
+              <a:schemeClr val="accent1"/>
+            </a:effectRef>
+            <a:fontRef idx="minor">
+              <a:schemeClr val="lt1"/>
+            </a:fontRef>
+          </p:style>
+          <p:txBody>
+            <a:bodyPr rtlCol="0" anchor="ctr"/>
+            <a:lstStyle/>
+            <a:p>
+              <a:pPr algn="ctr"/>
+              <a:endParaRPr lang="ko-KR" altLang="en-US" sz="1200" dirty="0">
+                <a:solidFill>
+                  <a:schemeClr val="tx1"/>
+                </a:solidFill>
+                <a:latin typeface="Arial Rounded MT Bold" panose="020F0704030504030204" pitchFamily="34" charset="0"/>
+              </a:endParaRPr>
+            </a:p>
+          </p:txBody>
+        </p:sp>
+        <p:sp>
+          <p:nvSpPr>
+            <p:cNvPr id="116" name="순서도: 문서 115">
+              <a:extLst>
+                <a:ext uri="{FF2B5EF4-FFF2-40B4-BE49-F238E27FC236}">
+                  <a16:creationId xmlns:a16="http://schemas.microsoft.com/office/drawing/2014/main" id="{BE4808A5-235A-40ED-B835-61C3936E28DD}"/>
+                </a:ext>
+              </a:extLst>
+            </p:cNvPr>
+            <p:cNvSpPr/>
+            <p:nvPr/>
+          </p:nvSpPr>
+          <p:spPr>
+            <a:xfrm>
+              <a:off x="6296605" y="1926028"/>
+              <a:ext cx="1197864" cy="521208"/>
+            </a:xfrm>
+            <a:prstGeom prst="flowChartDocument">
+              <a:avLst/>
+            </a:prstGeom>
+            <a:grpFill/>
+            <a:ln>
+              <a:solidFill>
+                <a:schemeClr val="tx1"/>
+              </a:solidFill>
+            </a:ln>
+          </p:spPr>
+          <p:style>
+            <a:lnRef idx="2">
+              <a:schemeClr val="accent1">
+                <a:shade val="50000"/>
+              </a:schemeClr>
+            </a:lnRef>
+            <a:fillRef idx="1">
+              <a:schemeClr val="accent1"/>
+            </a:fillRef>
+            <a:effectRef idx="0">
+              <a:schemeClr val="accent1"/>
+            </a:effectRef>
+            <a:fontRef idx="minor">
+              <a:schemeClr val="lt1"/>
+            </a:fontRef>
+          </p:style>
+          <p:txBody>
+            <a:bodyPr rtlCol="0" anchor="ctr"/>
+            <a:lstStyle/>
+            <a:p>
+              <a:pPr algn="ctr"/>
+              <a:r>
+                <a:rPr lang="en-US" altLang="ko-KR" sz="1100" dirty="0">
+                  <a:solidFill>
+                    <a:schemeClr val="tx1"/>
+                  </a:solidFill>
+                  <a:latin typeface="Arial Rounded MT Bold" panose="020F0704030504030204" pitchFamily="34" charset="0"/>
+                </a:rPr>
+                <a:t>User Scenario</a:t>
+              </a:r>
+            </a:p>
+            <a:p>
+              <a:pPr algn="ctr"/>
+              <a:r>
+                <a:rPr lang="en-US" altLang="ko-KR" sz="1100" dirty="0">
+                  <a:solidFill>
+                    <a:schemeClr val="tx1"/>
+                  </a:solidFill>
+                  <a:latin typeface="Arial Rounded MT Bold" panose="020F0704030504030204" pitchFamily="34" charset="0"/>
+                </a:rPr>
+                <a:t>Document</a:t>
+              </a:r>
+              <a:endParaRPr lang="ko-KR" altLang="en-US" sz="1100" dirty="0">
+                <a:solidFill>
+                  <a:schemeClr val="tx1"/>
+                </a:solidFill>
+                <a:latin typeface="Arial Rounded MT Bold" panose="020F0704030504030204" pitchFamily="34" charset="0"/>
+              </a:endParaRPr>
+            </a:p>
+          </p:txBody>
+        </p:sp>
+      </p:grpSp>
+      <p:cxnSp>
+        <p:nvCxnSpPr>
+          <p:cNvPr id="63" name="연결선: 꺾임 62">
+            <a:extLst>
+              <a:ext uri="{FF2B5EF4-FFF2-40B4-BE49-F238E27FC236}">
+                <a16:creationId xmlns:a16="http://schemas.microsoft.com/office/drawing/2014/main" id="{11B69D11-34C1-4658-B650-40A75D54F92D}"/>
+              </a:ext>
+            </a:extLst>
+          </p:cNvPr>
+          <p:cNvCxnSpPr>
+            <a:stCxn id="12" idx="3"/>
+            <a:endCxn id="84" idx="1"/>
+          </p:cNvCxnSpPr>
+          <p:nvPr/>
+        </p:nvCxnSpPr>
+        <p:spPr>
+          <a:xfrm flipV="1">
+            <a:off x="4067614" y="2041159"/>
+            <a:ext cx="191844" cy="1076945"/>
+          </a:xfrm>
+          <a:prstGeom prst="bentConnector3">
+            <a:avLst/>
+          </a:prstGeom>
+          <a:ln>
+            <a:tailEnd type="triangle"/>
+          </a:ln>
+        </p:spPr>
+        <p:style>
+          <a:lnRef idx="1">
+            <a:schemeClr val="dk1"/>
+          </a:lnRef>
+          <a:fillRef idx="0">
+            <a:schemeClr val="dk1"/>
+          </a:fillRef>
+          <a:effectRef idx="0">
+            <a:schemeClr val="dk1"/>
+          </a:effectRef>
+          <a:fontRef idx="minor">
+            <a:schemeClr val="tx1"/>
+          </a:fontRef>
+        </p:style>
+      </p:cxnSp>
+      <p:cxnSp>
+        <p:nvCxnSpPr>
+          <p:cNvPr id="65" name="연결선: 꺾임 64">
+            <a:extLst>
+              <a:ext uri="{FF2B5EF4-FFF2-40B4-BE49-F238E27FC236}">
+                <a16:creationId xmlns:a16="http://schemas.microsoft.com/office/drawing/2014/main" id="{CB938C06-2476-4A29-A0EF-674EFA9DB34B}"/>
+              </a:ext>
+            </a:extLst>
+          </p:cNvPr>
+          <p:cNvCxnSpPr>
+            <a:cxnSpLocks/>
+            <a:stCxn id="12" idx="3"/>
+            <a:endCxn id="28" idx="1"/>
+          </p:cNvCxnSpPr>
+          <p:nvPr/>
+        </p:nvCxnSpPr>
+        <p:spPr>
+          <a:xfrm>
+            <a:off x="4067614" y="3118104"/>
+            <a:ext cx="191844" cy="1344390"/>
+          </a:xfrm>
+          <a:prstGeom prst="bentConnector3">
+            <a:avLst/>
+          </a:prstGeom>
+          <a:ln>
+            <a:tailEnd type="triangle"/>
+          </a:ln>
+        </p:spPr>
+        <p:style>
+          <a:lnRef idx="1">
+            <a:schemeClr val="dk1"/>
+          </a:lnRef>
+          <a:fillRef idx="0">
+            <a:schemeClr val="dk1"/>
+          </a:fillRef>
+          <a:effectRef idx="0">
+            <a:schemeClr val="dk1"/>
+          </a:effectRef>
+          <a:fontRef idx="minor">
+            <a:schemeClr val="tx1"/>
+          </a:fontRef>
+        </p:style>
+      </p:cxnSp>
+      <p:pic>
+        <p:nvPicPr>
+          <p:cNvPr id="117" name="그림 116">
+            <a:extLst>
+              <a:ext uri="{FF2B5EF4-FFF2-40B4-BE49-F238E27FC236}">
+                <a16:creationId xmlns:a16="http://schemas.microsoft.com/office/drawing/2014/main" id="{E6E57430-A9D6-44BD-9B2C-FE6C6AD48701}"/>
+              </a:ext>
+            </a:extLst>
+          </p:cNvPr>
+          <p:cNvPicPr>
+            <a:picLocks noChangeAspect="1"/>
+          </p:cNvPicPr>
+          <p:nvPr/>
+        </p:nvPicPr>
+        <p:blipFill>
+          <a:blip r:embed="rId4">
+            <a:extLst>
+              <a:ext uri="{28A0092B-C50C-407E-A947-70E740481C1C}">
+                <a14:useLocalDpi xmlns:a14="http://schemas.microsoft.com/office/drawing/2010/main" val="0"/>
+              </a:ext>
+            </a:extLst>
+          </a:blip>
+          <a:stretch>
+            <a:fillRect/>
+          </a:stretch>
+        </p:blipFill>
+        <p:spPr>
+          <a:xfrm>
+            <a:off x="7734544" y="3242924"/>
+            <a:ext cx="234969" cy="234969"/>
+          </a:xfrm>
+          <a:prstGeom prst="rect">
+            <a:avLst/>
+          </a:prstGeom>
+        </p:spPr>
+      </p:pic>
+      <p:cxnSp>
+        <p:nvCxnSpPr>
+          <p:cNvPr id="121" name="직선 화살표 연결선 120">
+            <a:extLst>
+              <a:ext uri="{FF2B5EF4-FFF2-40B4-BE49-F238E27FC236}">
+                <a16:creationId xmlns:a16="http://schemas.microsoft.com/office/drawing/2014/main" id="{8545E124-5158-429D-9796-2FCE8DD9BACE}"/>
+              </a:ext>
+            </a:extLst>
+          </p:cNvPr>
+          <p:cNvCxnSpPr>
+            <a:stCxn id="84" idx="3"/>
+            <a:endCxn id="72" idx="1"/>
+          </p:cNvCxnSpPr>
+          <p:nvPr/>
+        </p:nvCxnSpPr>
+        <p:spPr>
+          <a:xfrm>
+            <a:off x="6079550" y="2041159"/>
+            <a:ext cx="155322" cy="2392"/>
+          </a:xfrm>
+          <a:prstGeom prst="straightConnector1">
+            <a:avLst/>
+          </a:prstGeom>
+          <a:ln>
+            <a:tailEnd type="triangle"/>
+          </a:ln>
+        </p:spPr>
+        <p:style>
+          <a:lnRef idx="1">
+            <a:schemeClr val="dk1"/>
+          </a:lnRef>
+          <a:fillRef idx="0">
+            <a:schemeClr val="dk1"/>
+          </a:fillRef>
+          <a:effectRef idx="0">
+            <a:schemeClr val="dk1"/>
+          </a:effectRef>
+          <a:fontRef idx="minor">
+            <a:schemeClr val="tx1"/>
+          </a:fontRef>
+        </p:style>
+      </p:cxnSp>
+      <p:sp>
+        <p:nvSpPr>
+          <p:cNvPr id="132" name="화살표: 아래쪽 131">
+            <a:extLst>
+              <a:ext uri="{FF2B5EF4-FFF2-40B4-BE49-F238E27FC236}">
+                <a16:creationId xmlns:a16="http://schemas.microsoft.com/office/drawing/2014/main" id="{F56553A2-9C69-4709-8AEA-D449A449E47D}"/>
+              </a:ext>
+            </a:extLst>
+          </p:cNvPr>
+          <p:cNvSpPr/>
+          <p:nvPr/>
+        </p:nvSpPr>
+        <p:spPr>
+          <a:xfrm>
+            <a:off x="4974770" y="4975403"/>
+            <a:ext cx="389467" cy="201574"/>
+          </a:xfrm>
+          <a:prstGeom prst="downArrow">
+            <a:avLst/>
+          </a:prstGeom>
+          <a:solidFill>
+            <a:srgbClr val="7030A0"/>
+          </a:solidFill>
+          <a:ln>
+            <a:solidFill>
+              <a:srgbClr val="7030A0"/>
+            </a:solidFill>
+          </a:ln>
+        </p:spPr>
+        <p:style>
+          <a:lnRef idx="2">
+            <a:schemeClr val="accent1">
+              <a:shade val="50000"/>
+            </a:schemeClr>
+          </a:lnRef>
+          <a:fillRef idx="1">
+            <a:schemeClr val="accent1"/>
+          </a:fillRef>
+          <a:effectRef idx="0">
+            <a:schemeClr val="accent1"/>
+          </a:effectRef>
+          <a:fontRef idx="minor">
+            <a:schemeClr val="lt1"/>
+          </a:fontRef>
+        </p:style>
+        <p:txBody>
+          <a:bodyPr rtlCol="0" anchor="ctr"/>
+          <a:lstStyle/>
+          <a:p>
+            <a:pPr algn="ctr"/>
+            <a:endParaRPr lang="ko-KR" altLang="en-US"/>
+          </a:p>
+        </p:txBody>
+      </p:sp>
+      <p:cxnSp>
+        <p:nvCxnSpPr>
+          <p:cNvPr id="147" name="연결선: 꺾임 146">
+            <a:extLst>
+              <a:ext uri="{FF2B5EF4-FFF2-40B4-BE49-F238E27FC236}">
+                <a16:creationId xmlns:a16="http://schemas.microsoft.com/office/drawing/2014/main" id="{59A1E24D-9BBF-4CCC-90D5-AFCA7B17D5D5}"/>
+              </a:ext>
+            </a:extLst>
+          </p:cNvPr>
+          <p:cNvCxnSpPr>
+            <a:stCxn id="72" idx="3"/>
+            <a:endCxn id="41" idx="1"/>
+          </p:cNvCxnSpPr>
+          <p:nvPr/>
+        </p:nvCxnSpPr>
+        <p:spPr>
+          <a:xfrm>
+            <a:off x="7432736" y="2043551"/>
+            <a:ext cx="1854388" cy="856421"/>
+          </a:xfrm>
+          <a:prstGeom prst="bentConnector3">
+            <a:avLst>
+              <a:gd name="adj1" fmla="val 50000"/>
+            </a:avLst>
+          </a:prstGeom>
+          <a:ln>
+            <a:tailEnd type="triangle"/>
+          </a:ln>
+        </p:spPr>
+        <p:style>
+          <a:lnRef idx="1">
+            <a:schemeClr val="dk1"/>
+          </a:lnRef>
+          <a:fillRef idx="0">
+            <a:schemeClr val="dk1"/>
+          </a:fillRef>
+          <a:effectRef idx="0">
+            <a:schemeClr val="dk1"/>
+          </a:effectRef>
+          <a:fontRef idx="minor">
+            <a:schemeClr val="tx1"/>
+          </a:fontRef>
+        </p:style>
+      </p:cxnSp>
+      <p:cxnSp>
+        <p:nvCxnSpPr>
+          <p:cNvPr id="156" name="직선 화살표 연결선 155">
+            <a:extLst>
+              <a:ext uri="{FF2B5EF4-FFF2-40B4-BE49-F238E27FC236}">
+                <a16:creationId xmlns:a16="http://schemas.microsoft.com/office/drawing/2014/main" id="{76CE891F-CC18-478D-80D1-9F0784CBF1A7}"/>
+              </a:ext>
+            </a:extLst>
+          </p:cNvPr>
+          <p:cNvCxnSpPr>
+            <a:stCxn id="41" idx="3"/>
+            <a:endCxn id="92" idx="1"/>
+          </p:cNvCxnSpPr>
+          <p:nvPr/>
+        </p:nvCxnSpPr>
+        <p:spPr>
+          <a:xfrm flipV="1">
+            <a:off x="10753974" y="2897863"/>
+            <a:ext cx="205309" cy="2109"/>
+          </a:xfrm>
+          <a:prstGeom prst="straightConnector1">
+            <a:avLst/>
+          </a:prstGeom>
+          <a:ln>
+            <a:tailEnd type="triangle"/>
+          </a:ln>
+        </p:spPr>
+        <p:style>
+          <a:lnRef idx="1">
+            <a:schemeClr val="dk1"/>
+          </a:lnRef>
+          <a:fillRef idx="0">
+            <a:schemeClr val="dk1"/>
+          </a:fillRef>
+          <a:effectRef idx="0">
+            <a:schemeClr val="dk1"/>
+          </a:effectRef>
+          <a:fontRef idx="minor">
+            <a:schemeClr val="tx1"/>
+          </a:fontRef>
+        </p:style>
+      </p:cxnSp>
+      <p:pic>
+        <p:nvPicPr>
+          <p:cNvPr id="159" name="그림 158">
+            <a:extLst>
+              <a:ext uri="{FF2B5EF4-FFF2-40B4-BE49-F238E27FC236}">
+                <a16:creationId xmlns:a16="http://schemas.microsoft.com/office/drawing/2014/main" id="{19A87EAE-A6A4-4ABC-947B-2D4950CB9315}"/>
+              </a:ext>
+            </a:extLst>
+          </p:cNvPr>
+          <p:cNvPicPr>
+            <a:picLocks noChangeAspect="1"/>
+          </p:cNvPicPr>
+          <p:nvPr/>
+        </p:nvPicPr>
+        <p:blipFill>
+          <a:blip r:embed="rId4">
+            <a:extLst>
+              <a:ext uri="{28A0092B-C50C-407E-A947-70E740481C1C}">
+                <a14:useLocalDpi xmlns:a14="http://schemas.microsoft.com/office/drawing/2010/main" val="0"/>
+              </a:ext>
+            </a:extLst>
+          </a:blip>
+          <a:stretch>
+            <a:fillRect/>
+          </a:stretch>
+        </p:blipFill>
+        <p:spPr>
+          <a:xfrm>
+            <a:off x="9311142" y="2268791"/>
+            <a:ext cx="234969" cy="234969"/>
+          </a:xfrm>
+          <a:prstGeom prst="rect">
+            <a:avLst/>
+          </a:prstGeom>
+        </p:spPr>
+      </p:pic>
+      <p:pic>
+        <p:nvPicPr>
+          <p:cNvPr id="160" name="그림 159">
+            <a:extLst>
+              <a:ext uri="{FF2B5EF4-FFF2-40B4-BE49-F238E27FC236}">
+                <a16:creationId xmlns:a16="http://schemas.microsoft.com/office/drawing/2014/main" id="{4D7ACD9F-B107-47B7-BA9D-DB566CA3167A}"/>
+              </a:ext>
+            </a:extLst>
+          </p:cNvPr>
+          <p:cNvPicPr>
+            <a:picLocks noChangeAspect="1"/>
+          </p:cNvPicPr>
+          <p:nvPr/>
+        </p:nvPicPr>
+        <p:blipFill>
+          <a:blip r:embed="rId4">
+            <a:extLst>
+              <a:ext uri="{28A0092B-C50C-407E-A947-70E740481C1C}">
+                <a14:useLocalDpi xmlns:a14="http://schemas.microsoft.com/office/drawing/2010/main" val="0"/>
+              </a:ext>
+            </a:extLst>
+          </a:blip>
+          <a:stretch>
+            <a:fillRect/>
+          </a:stretch>
+        </p:blipFill>
+        <p:spPr>
+          <a:xfrm>
+            <a:off x="4426552" y="5010813"/>
+            <a:ext cx="234969" cy="234969"/>
+          </a:xfrm>
+          <a:prstGeom prst="rect">
+            <a:avLst/>
+          </a:prstGeom>
+        </p:spPr>
+      </p:pic>
+      <p:pic>
+        <p:nvPicPr>
+          <p:cNvPr id="5" name="그림 4">
+            <a:extLst>
+              <a:ext uri="{FF2B5EF4-FFF2-40B4-BE49-F238E27FC236}">
+                <a16:creationId xmlns:a16="http://schemas.microsoft.com/office/drawing/2014/main" id="{DD6D5A29-A3A9-4628-BA23-AA30637143AD}"/>
+              </a:ext>
+            </a:extLst>
+          </p:cNvPr>
+          <p:cNvPicPr>
+            <a:picLocks noChangeAspect="1"/>
+          </p:cNvPicPr>
+          <p:nvPr/>
+        </p:nvPicPr>
+        <p:blipFill>
+          <a:blip r:embed="rId5"/>
+          <a:stretch>
+            <a:fillRect/>
+          </a:stretch>
+        </p:blipFill>
+        <p:spPr>
+          <a:xfrm>
+            <a:off x="55047" y="2921037"/>
+            <a:ext cx="305108" cy="305108"/>
+          </a:xfrm>
+          <a:prstGeom prst="rect">
+            <a:avLst/>
+          </a:prstGeom>
+        </p:spPr>
+      </p:pic>
+      <p:cxnSp>
+        <p:nvCxnSpPr>
+          <p:cNvPr id="174" name="직선 화살표 연결선 173">
+            <a:extLst>
+              <a:ext uri="{FF2B5EF4-FFF2-40B4-BE49-F238E27FC236}">
+                <a16:creationId xmlns:a16="http://schemas.microsoft.com/office/drawing/2014/main" id="{8ABA97BF-D4B7-4051-969E-5F2F00AAA056}"/>
+              </a:ext>
+            </a:extLst>
+          </p:cNvPr>
+          <p:cNvCxnSpPr>
+            <a:stCxn id="26" idx="4"/>
+            <a:endCxn id="112" idx="1"/>
+          </p:cNvCxnSpPr>
+          <p:nvPr/>
+        </p:nvCxnSpPr>
+        <p:spPr>
+          <a:xfrm flipV="1">
+            <a:off x="3957381" y="4010963"/>
+            <a:ext cx="526542" cy="6472"/>
+          </a:xfrm>
+          <a:prstGeom prst="straightConnector1">
+            <a:avLst/>
+          </a:prstGeom>
+          <a:ln>
+            <a:prstDash val="dash"/>
+            <a:tailEnd type="triangle"/>
+          </a:ln>
+        </p:spPr>
+        <p:style>
+          <a:lnRef idx="1">
+            <a:schemeClr val="dk1"/>
+          </a:lnRef>
+          <a:fillRef idx="0">
+            <a:schemeClr val="dk1"/>
+          </a:fillRef>
+          <a:effectRef idx="0">
+            <a:schemeClr val="dk1"/>
+          </a:effectRef>
+          <a:fontRef idx="minor">
+            <a:schemeClr val="tx1"/>
+          </a:fontRef>
+        </p:style>
+      </p:cxnSp>
+      <p:cxnSp>
+        <p:nvCxnSpPr>
+          <p:cNvPr id="176" name="직선 화살표 연결선 175">
+            <a:extLst>
+              <a:ext uri="{FF2B5EF4-FFF2-40B4-BE49-F238E27FC236}">
+                <a16:creationId xmlns:a16="http://schemas.microsoft.com/office/drawing/2014/main" id="{EEDD75E1-F59C-4131-84A4-C3B3108F8368}"/>
+              </a:ext>
+            </a:extLst>
+          </p:cNvPr>
+          <p:cNvCxnSpPr>
+            <a:stCxn id="27" idx="4"/>
+            <a:endCxn id="116" idx="1"/>
+          </p:cNvCxnSpPr>
+          <p:nvPr/>
+        </p:nvCxnSpPr>
+        <p:spPr>
+          <a:xfrm>
+            <a:off x="3957381" y="4704704"/>
+            <a:ext cx="526542" cy="454"/>
+          </a:xfrm>
+          <a:prstGeom prst="straightConnector1">
+            <a:avLst/>
+          </a:prstGeom>
+          <a:ln>
+            <a:prstDash val="dash"/>
+            <a:tailEnd type="triangle"/>
+          </a:ln>
+        </p:spPr>
+        <p:style>
+          <a:lnRef idx="1">
+            <a:schemeClr val="dk1"/>
+          </a:lnRef>
+          <a:fillRef idx="0">
+            <a:schemeClr val="dk1"/>
+          </a:fillRef>
+          <a:effectRef idx="0">
+            <a:schemeClr val="dk1"/>
+          </a:effectRef>
+          <a:fontRef idx="minor">
+            <a:schemeClr val="tx1"/>
+          </a:fontRef>
+        </p:style>
+      </p:cxnSp>
+      <p:grpSp>
+        <p:nvGrpSpPr>
+          <p:cNvPr id="177" name="그룹 176">
+            <a:extLst>
+              <a:ext uri="{FF2B5EF4-FFF2-40B4-BE49-F238E27FC236}">
+                <a16:creationId xmlns:a16="http://schemas.microsoft.com/office/drawing/2014/main" id="{692548B4-2896-421E-B14E-A199371F81AC}"/>
+              </a:ext>
+            </a:extLst>
+          </p:cNvPr>
+          <p:cNvGrpSpPr/>
+          <p:nvPr/>
+        </p:nvGrpSpPr>
+        <p:grpSpPr>
+          <a:xfrm>
+            <a:off x="6236677" y="3633773"/>
+            <a:ext cx="1342644" cy="637794"/>
+            <a:chOff x="6296605" y="1809442"/>
+            <a:chExt cx="1342644" cy="637794"/>
+          </a:xfrm>
+          <a:solidFill>
+            <a:schemeClr val="accent2">
+              <a:lumMod val="20000"/>
+              <a:lumOff val="80000"/>
+            </a:schemeClr>
+          </a:solidFill>
+        </p:grpSpPr>
+        <p:sp>
+          <p:nvSpPr>
+            <p:cNvPr id="178" name="순서도: 문서 177">
+              <a:extLst>
+                <a:ext uri="{FF2B5EF4-FFF2-40B4-BE49-F238E27FC236}">
+                  <a16:creationId xmlns:a16="http://schemas.microsoft.com/office/drawing/2014/main" id="{7D42E817-3F92-4E87-83E5-5D7B82FCE86E}"/>
+                </a:ext>
+              </a:extLst>
+            </p:cNvPr>
+            <p:cNvSpPr/>
+            <p:nvPr/>
+          </p:nvSpPr>
+          <p:spPr>
+            <a:xfrm>
+              <a:off x="6441385" y="1809442"/>
+              <a:ext cx="1197864" cy="521208"/>
+            </a:xfrm>
+            <a:prstGeom prst="flowChartDocument">
+              <a:avLst/>
+            </a:prstGeom>
+            <a:grpFill/>
+            <a:ln>
+              <a:solidFill>
+                <a:schemeClr val="tx1"/>
+              </a:solidFill>
+            </a:ln>
+          </p:spPr>
+          <p:style>
+            <a:lnRef idx="2">
+              <a:schemeClr val="accent1">
+                <a:shade val="50000"/>
+              </a:schemeClr>
+            </a:lnRef>
+            <a:fillRef idx="1">
+              <a:schemeClr val="accent1"/>
+            </a:fillRef>
+            <a:effectRef idx="0">
+              <a:schemeClr val="accent1"/>
+            </a:effectRef>
+            <a:fontRef idx="minor">
+              <a:schemeClr val="lt1"/>
+            </a:fontRef>
+          </p:style>
+          <p:txBody>
+            <a:bodyPr rtlCol="0" anchor="ctr"/>
+            <a:lstStyle/>
+            <a:p>
+              <a:pPr algn="ctr"/>
+              <a:r>
+                <a:rPr lang="en-US" altLang="ko-KR" sz="1200" dirty="0">
+                  <a:solidFill>
+                    <a:schemeClr val="tx1"/>
+                  </a:solidFill>
+                  <a:latin typeface="Arial Rounded MT Bold" panose="020F0704030504030204" pitchFamily="34" charset="0"/>
+                </a:rPr>
+                <a:t>Resolution</a:t>
+              </a:r>
+            </a:p>
+            <a:p>
+              <a:pPr algn="ctr"/>
+              <a:r>
+                <a:rPr lang="en-US" altLang="ko-KR" sz="1200" dirty="0">
+                  <a:solidFill>
+                    <a:schemeClr val="tx1"/>
+                  </a:solidFill>
+                  <a:latin typeface="Arial Rounded MT Bold" panose="020F0704030504030204" pitchFamily="34" charset="0"/>
+                </a:rPr>
+                <a:t>Document</a:t>
+              </a:r>
+              <a:endParaRPr lang="ko-KR" altLang="en-US" sz="1200" dirty="0">
+                <a:solidFill>
+                  <a:schemeClr val="tx1"/>
+                </a:solidFill>
+                <a:latin typeface="Arial Rounded MT Bold" panose="020F0704030504030204" pitchFamily="34" charset="0"/>
+              </a:endParaRPr>
+            </a:p>
+          </p:txBody>
+        </p:sp>
+        <p:sp>
+          <p:nvSpPr>
+            <p:cNvPr id="179" name="순서도: 문서 178">
+              <a:extLst>
+                <a:ext uri="{FF2B5EF4-FFF2-40B4-BE49-F238E27FC236}">
+                  <a16:creationId xmlns:a16="http://schemas.microsoft.com/office/drawing/2014/main" id="{755F0E2E-6EC0-4312-A36B-21B668CC932A}"/>
+                </a:ext>
+              </a:extLst>
+            </p:cNvPr>
+            <p:cNvSpPr/>
+            <p:nvPr/>
+          </p:nvSpPr>
+          <p:spPr>
+            <a:xfrm>
+              <a:off x="6368995" y="1864306"/>
+              <a:ext cx="1197864" cy="521208"/>
+            </a:xfrm>
+            <a:prstGeom prst="flowChartDocument">
+              <a:avLst/>
+            </a:prstGeom>
+            <a:grpFill/>
+            <a:ln>
+              <a:solidFill>
+                <a:schemeClr val="tx1"/>
+              </a:solidFill>
+            </a:ln>
+          </p:spPr>
+          <p:style>
+            <a:lnRef idx="2">
+              <a:schemeClr val="accent1">
+                <a:shade val="50000"/>
+              </a:schemeClr>
+            </a:lnRef>
+            <a:fillRef idx="1">
+              <a:schemeClr val="accent1"/>
+            </a:fillRef>
+            <a:effectRef idx="0">
+              <a:schemeClr val="accent1"/>
+            </a:effectRef>
+            <a:fontRef idx="minor">
+              <a:schemeClr val="lt1"/>
+            </a:fontRef>
+          </p:style>
+          <p:txBody>
+            <a:bodyPr rtlCol="0" anchor="ctr"/>
+            <a:lstStyle/>
+            <a:p>
+              <a:pPr algn="ctr"/>
+              <a:endParaRPr lang="ko-KR" altLang="en-US" sz="1200" dirty="0">
+                <a:solidFill>
+                  <a:schemeClr val="tx1"/>
+                </a:solidFill>
+                <a:latin typeface="Arial Rounded MT Bold" panose="020F0704030504030204" pitchFamily="34" charset="0"/>
+              </a:endParaRPr>
+            </a:p>
+          </p:txBody>
+        </p:sp>
+        <p:sp>
+          <p:nvSpPr>
+            <p:cNvPr id="180" name="순서도: 문서 179">
+              <a:extLst>
+                <a:ext uri="{FF2B5EF4-FFF2-40B4-BE49-F238E27FC236}">
+                  <a16:creationId xmlns:a16="http://schemas.microsoft.com/office/drawing/2014/main" id="{02077544-5F42-4677-AE5F-DD7A5FE4B628}"/>
+                </a:ext>
+              </a:extLst>
+            </p:cNvPr>
+            <p:cNvSpPr/>
+            <p:nvPr/>
+          </p:nvSpPr>
+          <p:spPr>
+            <a:xfrm>
+              <a:off x="6296605" y="1926028"/>
+              <a:ext cx="1197864" cy="521208"/>
+            </a:xfrm>
+            <a:prstGeom prst="flowChartDocument">
+              <a:avLst/>
+            </a:prstGeom>
+            <a:grpFill/>
+            <a:ln>
+              <a:solidFill>
+                <a:schemeClr val="tx1"/>
+              </a:solidFill>
+            </a:ln>
+          </p:spPr>
+          <p:style>
+            <a:lnRef idx="2">
+              <a:schemeClr val="accent1">
+                <a:shade val="50000"/>
+              </a:schemeClr>
+            </a:lnRef>
+            <a:fillRef idx="1">
+              <a:schemeClr val="accent1"/>
+            </a:fillRef>
+            <a:effectRef idx="0">
+              <a:schemeClr val="accent1"/>
+            </a:effectRef>
+            <a:fontRef idx="minor">
+              <a:schemeClr val="lt1"/>
+            </a:fontRef>
+          </p:style>
+          <p:txBody>
+            <a:bodyPr rtlCol="0" anchor="ctr"/>
+            <a:lstStyle/>
+            <a:p>
+              <a:pPr algn="ctr"/>
+              <a:r>
+                <a:rPr lang="en-US" altLang="ko-KR" sz="1100" dirty="0">
+                  <a:solidFill>
+                    <a:schemeClr val="tx1"/>
+                  </a:solidFill>
+                  <a:latin typeface="Arial Rounded MT Bold" panose="020F0704030504030204" pitchFamily="34" charset="0"/>
+                </a:rPr>
+                <a:t>Resolution </a:t>
+              </a:r>
+            </a:p>
+            <a:p>
+              <a:pPr algn="ctr"/>
+              <a:r>
+                <a:rPr lang="en-US" altLang="ko-KR" sz="1100" dirty="0">
+                  <a:solidFill>
+                    <a:schemeClr val="tx1"/>
+                  </a:solidFill>
+                  <a:latin typeface="Arial Rounded MT Bold" panose="020F0704030504030204" pitchFamily="34" charset="0"/>
+                </a:rPr>
+                <a:t>w/ Ontology</a:t>
+              </a:r>
+            </a:p>
+          </p:txBody>
+        </p:sp>
+      </p:grpSp>
+      <p:grpSp>
+        <p:nvGrpSpPr>
+          <p:cNvPr id="181" name="그룹 180">
+            <a:extLst>
+              <a:ext uri="{FF2B5EF4-FFF2-40B4-BE49-F238E27FC236}">
+                <a16:creationId xmlns:a16="http://schemas.microsoft.com/office/drawing/2014/main" id="{FA86093C-A902-45CB-8783-E7177077C8AD}"/>
+              </a:ext>
+            </a:extLst>
+          </p:cNvPr>
+          <p:cNvGrpSpPr/>
+          <p:nvPr/>
+        </p:nvGrpSpPr>
+        <p:grpSpPr>
+          <a:xfrm>
+            <a:off x="6236677" y="4327968"/>
+            <a:ext cx="1342644" cy="637794"/>
+            <a:chOff x="6296605" y="1809442"/>
+            <a:chExt cx="1342644" cy="637794"/>
+          </a:xfrm>
+          <a:solidFill>
+            <a:schemeClr val="accent2">
+              <a:lumMod val="20000"/>
+              <a:lumOff val="80000"/>
+            </a:schemeClr>
+          </a:solidFill>
+        </p:grpSpPr>
+        <p:sp>
+          <p:nvSpPr>
+            <p:cNvPr id="182" name="순서도: 문서 181">
+              <a:extLst>
+                <a:ext uri="{FF2B5EF4-FFF2-40B4-BE49-F238E27FC236}">
+                  <a16:creationId xmlns:a16="http://schemas.microsoft.com/office/drawing/2014/main" id="{5CE4C42E-1E79-4102-AFE0-12D4FBED34C2}"/>
+                </a:ext>
+              </a:extLst>
+            </p:cNvPr>
+            <p:cNvSpPr/>
+            <p:nvPr/>
+          </p:nvSpPr>
+          <p:spPr>
+            <a:xfrm>
+              <a:off x="6441385" y="1809442"/>
+              <a:ext cx="1197864" cy="521208"/>
+            </a:xfrm>
+            <a:prstGeom prst="flowChartDocument">
+              <a:avLst/>
+            </a:prstGeom>
+            <a:grpFill/>
+            <a:ln>
+              <a:solidFill>
+                <a:schemeClr val="tx1"/>
+              </a:solidFill>
+            </a:ln>
+          </p:spPr>
+          <p:style>
+            <a:lnRef idx="2">
+              <a:schemeClr val="accent1">
+                <a:shade val="50000"/>
+              </a:schemeClr>
+            </a:lnRef>
+            <a:fillRef idx="1">
+              <a:schemeClr val="accent1"/>
+            </a:fillRef>
+            <a:effectRef idx="0">
+              <a:schemeClr val="accent1"/>
+            </a:effectRef>
+            <a:fontRef idx="minor">
+              <a:schemeClr val="lt1"/>
+            </a:fontRef>
+          </p:style>
+          <p:txBody>
+            <a:bodyPr rtlCol="0" anchor="ctr"/>
+            <a:lstStyle/>
+            <a:p>
+              <a:pPr algn="ctr"/>
+              <a:r>
+                <a:rPr lang="en-US" altLang="ko-KR" sz="1200" dirty="0">
+                  <a:solidFill>
+                    <a:schemeClr val="tx1"/>
+                  </a:solidFill>
+                  <a:latin typeface="Arial Rounded MT Bold" panose="020F0704030504030204" pitchFamily="34" charset="0"/>
+                </a:rPr>
+                <a:t>Resolution</a:t>
+              </a:r>
+            </a:p>
+            <a:p>
+              <a:pPr algn="ctr"/>
+              <a:r>
+                <a:rPr lang="en-US" altLang="ko-KR" sz="1200" dirty="0">
+                  <a:solidFill>
+                    <a:schemeClr val="tx1"/>
+                  </a:solidFill>
+                  <a:latin typeface="Arial Rounded MT Bold" panose="020F0704030504030204" pitchFamily="34" charset="0"/>
+                </a:rPr>
+                <a:t>Document</a:t>
+              </a:r>
+              <a:endParaRPr lang="ko-KR" altLang="en-US" sz="1200" dirty="0">
+                <a:solidFill>
+                  <a:schemeClr val="tx1"/>
+                </a:solidFill>
+                <a:latin typeface="Arial Rounded MT Bold" panose="020F0704030504030204" pitchFamily="34" charset="0"/>
+              </a:endParaRPr>
+            </a:p>
+          </p:txBody>
+        </p:sp>
+        <p:sp>
+          <p:nvSpPr>
+            <p:cNvPr id="183" name="순서도: 문서 182">
+              <a:extLst>
+                <a:ext uri="{FF2B5EF4-FFF2-40B4-BE49-F238E27FC236}">
+                  <a16:creationId xmlns:a16="http://schemas.microsoft.com/office/drawing/2014/main" id="{12563119-C1CC-41E0-90DC-F992A3CAAE1E}"/>
+                </a:ext>
+              </a:extLst>
+            </p:cNvPr>
+            <p:cNvSpPr/>
+            <p:nvPr/>
+          </p:nvSpPr>
+          <p:spPr>
+            <a:xfrm>
+              <a:off x="6368995" y="1864306"/>
+              <a:ext cx="1197864" cy="521208"/>
+            </a:xfrm>
+            <a:prstGeom prst="flowChartDocument">
+              <a:avLst/>
+            </a:prstGeom>
+            <a:grpFill/>
+            <a:ln>
+              <a:solidFill>
+                <a:schemeClr val="tx1"/>
+              </a:solidFill>
+            </a:ln>
+          </p:spPr>
+          <p:style>
+            <a:lnRef idx="2">
+              <a:schemeClr val="accent1">
+                <a:shade val="50000"/>
+              </a:schemeClr>
+            </a:lnRef>
+            <a:fillRef idx="1">
+              <a:schemeClr val="accent1"/>
+            </a:fillRef>
+            <a:effectRef idx="0">
+              <a:schemeClr val="accent1"/>
+            </a:effectRef>
+            <a:fontRef idx="minor">
+              <a:schemeClr val="lt1"/>
+            </a:fontRef>
+          </p:style>
+          <p:txBody>
+            <a:bodyPr rtlCol="0" anchor="ctr"/>
+            <a:lstStyle/>
+            <a:p>
+              <a:pPr algn="ctr"/>
+              <a:endParaRPr lang="ko-KR" altLang="en-US" sz="1200" dirty="0">
+                <a:solidFill>
+                  <a:schemeClr val="tx1"/>
+                </a:solidFill>
+                <a:latin typeface="Arial Rounded MT Bold" panose="020F0704030504030204" pitchFamily="34" charset="0"/>
+              </a:endParaRPr>
+            </a:p>
+          </p:txBody>
+        </p:sp>
+        <p:sp>
+          <p:nvSpPr>
+            <p:cNvPr id="184" name="순서도: 문서 183">
+              <a:extLst>
+                <a:ext uri="{FF2B5EF4-FFF2-40B4-BE49-F238E27FC236}">
+                  <a16:creationId xmlns:a16="http://schemas.microsoft.com/office/drawing/2014/main" id="{0CCEA453-195C-4039-BA67-F4119EFD8157}"/>
+                </a:ext>
+              </a:extLst>
+            </p:cNvPr>
+            <p:cNvSpPr/>
+            <p:nvPr/>
+          </p:nvSpPr>
+          <p:spPr>
+            <a:xfrm>
+              <a:off x="6296605" y="1926028"/>
+              <a:ext cx="1197864" cy="521208"/>
+            </a:xfrm>
+            <a:prstGeom prst="flowChartDocument">
+              <a:avLst/>
+            </a:prstGeom>
+            <a:grpFill/>
+            <a:ln>
+              <a:solidFill>
+                <a:schemeClr val="tx1"/>
+              </a:solidFill>
+            </a:ln>
+          </p:spPr>
+          <p:style>
+            <a:lnRef idx="2">
+              <a:schemeClr val="accent1">
+                <a:shade val="50000"/>
+              </a:schemeClr>
+            </a:lnRef>
+            <a:fillRef idx="1">
+              <a:schemeClr val="accent1"/>
+            </a:fillRef>
+            <a:effectRef idx="0">
+              <a:schemeClr val="accent1"/>
+            </a:effectRef>
+            <a:fontRef idx="minor">
+              <a:schemeClr val="lt1"/>
+            </a:fontRef>
+          </p:style>
+          <p:txBody>
+            <a:bodyPr rtlCol="0" anchor="ctr"/>
+            <a:lstStyle/>
+            <a:p>
+              <a:pPr algn="ctr"/>
+              <a:r>
+                <a:rPr lang="en-US" altLang="ko-KR" sz="1100" dirty="0">
+                  <a:solidFill>
+                    <a:schemeClr val="tx1"/>
+                  </a:solidFill>
+                  <a:latin typeface="Arial Rounded MT Bold" panose="020F0704030504030204" pitchFamily="34" charset="0"/>
+                </a:rPr>
+                <a:t>User Scenario</a:t>
+              </a:r>
+            </a:p>
+            <a:p>
+              <a:pPr algn="ctr"/>
+              <a:r>
+                <a:rPr lang="en-US" altLang="ko-KR" sz="1100" dirty="0">
+                  <a:solidFill>
+                    <a:schemeClr val="tx1"/>
+                  </a:solidFill>
+                  <a:latin typeface="Arial Rounded MT Bold" panose="020F0704030504030204" pitchFamily="34" charset="0"/>
+                </a:rPr>
+                <a:t>w/ Ontology</a:t>
+              </a:r>
+            </a:p>
+          </p:txBody>
+        </p:sp>
+      </p:grpSp>
+      <p:cxnSp>
+        <p:nvCxnSpPr>
+          <p:cNvPr id="195" name="연결선: 꺾임 194">
+            <a:extLst>
+              <a:ext uri="{FF2B5EF4-FFF2-40B4-BE49-F238E27FC236}">
+                <a16:creationId xmlns:a16="http://schemas.microsoft.com/office/drawing/2014/main" id="{0D2766F9-A856-4DF7-B460-A8F1E79C88F3}"/>
+              </a:ext>
+            </a:extLst>
+          </p:cNvPr>
+          <p:cNvCxnSpPr>
+            <a:stCxn id="46" idx="3"/>
+            <a:endCxn id="180" idx="1"/>
+          </p:cNvCxnSpPr>
+          <p:nvPr/>
+        </p:nvCxnSpPr>
+        <p:spPr>
+          <a:xfrm flipV="1">
+            <a:off x="5841693" y="4010963"/>
+            <a:ext cx="394984" cy="1335606"/>
+          </a:xfrm>
+          <a:prstGeom prst="bentConnector3">
+            <a:avLst>
+              <a:gd name="adj1" fmla="val 73579"/>
+            </a:avLst>
+          </a:prstGeom>
+          <a:ln>
+            <a:tailEnd type="triangle"/>
+          </a:ln>
+        </p:spPr>
+        <p:style>
+          <a:lnRef idx="1">
+            <a:schemeClr val="dk1"/>
+          </a:lnRef>
+          <a:fillRef idx="0">
+            <a:schemeClr val="dk1"/>
+          </a:fillRef>
+          <a:effectRef idx="0">
+            <a:schemeClr val="dk1"/>
+          </a:effectRef>
+          <a:fontRef idx="minor">
+            <a:schemeClr val="tx1"/>
+          </a:fontRef>
+        </p:style>
+      </p:cxnSp>
+      <p:cxnSp>
+        <p:nvCxnSpPr>
+          <p:cNvPr id="198" name="연결선: 꺾임 197">
+            <a:extLst>
+              <a:ext uri="{FF2B5EF4-FFF2-40B4-BE49-F238E27FC236}">
+                <a16:creationId xmlns:a16="http://schemas.microsoft.com/office/drawing/2014/main" id="{31955808-BCD5-4C2B-98F1-8AE63BD1FD75}"/>
+              </a:ext>
+            </a:extLst>
+          </p:cNvPr>
+          <p:cNvCxnSpPr>
+            <a:stCxn id="46" idx="3"/>
+            <a:endCxn id="184" idx="1"/>
+          </p:cNvCxnSpPr>
+          <p:nvPr/>
+        </p:nvCxnSpPr>
+        <p:spPr>
+          <a:xfrm flipV="1">
+            <a:off x="5841693" y="4705158"/>
+            <a:ext cx="394984" cy="641411"/>
+          </a:xfrm>
+          <a:prstGeom prst="bentConnector3">
+            <a:avLst>
+              <a:gd name="adj1" fmla="val 73579"/>
+            </a:avLst>
+          </a:prstGeom>
+          <a:ln>
+            <a:tailEnd type="triangle"/>
+          </a:ln>
+        </p:spPr>
+        <p:style>
+          <a:lnRef idx="1">
+            <a:schemeClr val="dk1"/>
+          </a:lnRef>
+          <a:fillRef idx="0">
+            <a:schemeClr val="dk1"/>
+          </a:fillRef>
+          <a:effectRef idx="0">
+            <a:schemeClr val="dk1"/>
+          </a:effectRef>
+          <a:fontRef idx="minor">
+            <a:schemeClr val="tx1"/>
+          </a:fontRef>
+        </p:style>
+      </p:cxnSp>
+      <p:grpSp>
+        <p:nvGrpSpPr>
+          <p:cNvPr id="200" name="그룹 199">
+            <a:extLst>
+              <a:ext uri="{FF2B5EF4-FFF2-40B4-BE49-F238E27FC236}">
+                <a16:creationId xmlns:a16="http://schemas.microsoft.com/office/drawing/2014/main" id="{BF7B224E-AC79-405E-92CF-43BA5C3054A2}"/>
+              </a:ext>
+            </a:extLst>
+          </p:cNvPr>
+          <p:cNvGrpSpPr/>
+          <p:nvPr/>
+        </p:nvGrpSpPr>
+        <p:grpSpPr>
+          <a:xfrm>
+            <a:off x="9349397" y="3633773"/>
+            <a:ext cx="1342644" cy="637794"/>
+            <a:chOff x="6296605" y="1809442"/>
+            <a:chExt cx="1342644" cy="637794"/>
+          </a:xfrm>
+          <a:solidFill>
+            <a:schemeClr val="accent2">
+              <a:lumMod val="20000"/>
+              <a:lumOff val="80000"/>
+            </a:schemeClr>
+          </a:solidFill>
+        </p:grpSpPr>
+        <p:sp>
+          <p:nvSpPr>
+            <p:cNvPr id="201" name="순서도: 문서 200">
+              <a:extLst>
+                <a:ext uri="{FF2B5EF4-FFF2-40B4-BE49-F238E27FC236}">
+                  <a16:creationId xmlns:a16="http://schemas.microsoft.com/office/drawing/2014/main" id="{86D42859-9464-4558-B48B-8AECAE30CEA5}"/>
+                </a:ext>
+              </a:extLst>
+            </p:cNvPr>
+            <p:cNvSpPr/>
+            <p:nvPr/>
+          </p:nvSpPr>
+          <p:spPr>
+            <a:xfrm>
+              <a:off x="6441385" y="1809442"/>
+              <a:ext cx="1197864" cy="521208"/>
+            </a:xfrm>
+            <a:prstGeom prst="flowChartDocument">
+              <a:avLst/>
+            </a:prstGeom>
+            <a:grpFill/>
+            <a:ln>
+              <a:solidFill>
+                <a:schemeClr val="tx1"/>
+              </a:solidFill>
+            </a:ln>
+          </p:spPr>
+          <p:style>
+            <a:lnRef idx="2">
+              <a:schemeClr val="accent1">
+                <a:shade val="50000"/>
+              </a:schemeClr>
+            </a:lnRef>
+            <a:fillRef idx="1">
+              <a:schemeClr val="accent1"/>
+            </a:fillRef>
+            <a:effectRef idx="0">
+              <a:schemeClr val="accent1"/>
+            </a:effectRef>
+            <a:fontRef idx="minor">
+              <a:schemeClr val="lt1"/>
+            </a:fontRef>
+          </p:style>
+          <p:txBody>
+            <a:bodyPr rtlCol="0" anchor="ctr"/>
+            <a:lstStyle/>
+            <a:p>
+              <a:pPr algn="ctr"/>
+              <a:r>
+                <a:rPr lang="en-US" altLang="ko-KR" sz="1200" dirty="0">
+                  <a:solidFill>
+                    <a:schemeClr val="tx1"/>
+                  </a:solidFill>
+                  <a:latin typeface="Arial Rounded MT Bold" panose="020F0704030504030204" pitchFamily="34" charset="0"/>
+                </a:rPr>
+                <a:t>Resolution</a:t>
+              </a:r>
+            </a:p>
+            <a:p>
+              <a:pPr algn="ctr"/>
+              <a:r>
+                <a:rPr lang="en-US" altLang="ko-KR" sz="1200" dirty="0">
+                  <a:solidFill>
+                    <a:schemeClr val="tx1"/>
+                  </a:solidFill>
+                  <a:latin typeface="Arial Rounded MT Bold" panose="020F0704030504030204" pitchFamily="34" charset="0"/>
+                </a:rPr>
+                <a:t>Document</a:t>
+              </a:r>
+              <a:endParaRPr lang="ko-KR" altLang="en-US" sz="1200" dirty="0">
+                <a:solidFill>
+                  <a:schemeClr val="tx1"/>
+                </a:solidFill>
+                <a:latin typeface="Arial Rounded MT Bold" panose="020F0704030504030204" pitchFamily="34" charset="0"/>
+              </a:endParaRPr>
+            </a:p>
+          </p:txBody>
+        </p:sp>
+        <p:sp>
+          <p:nvSpPr>
+            <p:cNvPr id="202" name="순서도: 문서 201">
+              <a:extLst>
+                <a:ext uri="{FF2B5EF4-FFF2-40B4-BE49-F238E27FC236}">
+                  <a16:creationId xmlns:a16="http://schemas.microsoft.com/office/drawing/2014/main" id="{D7F480BD-E37B-40AC-B1CE-5CB059BADF75}"/>
+                </a:ext>
+              </a:extLst>
+            </p:cNvPr>
+            <p:cNvSpPr/>
+            <p:nvPr/>
+          </p:nvSpPr>
+          <p:spPr>
+            <a:xfrm>
+              <a:off x="6368995" y="1864306"/>
+              <a:ext cx="1197864" cy="521208"/>
+            </a:xfrm>
+            <a:prstGeom prst="flowChartDocument">
+              <a:avLst/>
+            </a:prstGeom>
+            <a:grpFill/>
+            <a:ln>
+              <a:solidFill>
+                <a:schemeClr val="tx1"/>
+              </a:solidFill>
+            </a:ln>
+          </p:spPr>
+          <p:style>
+            <a:lnRef idx="2">
+              <a:schemeClr val="accent1">
+                <a:shade val="50000"/>
+              </a:schemeClr>
+            </a:lnRef>
+            <a:fillRef idx="1">
+              <a:schemeClr val="accent1"/>
+            </a:fillRef>
+            <a:effectRef idx="0">
+              <a:schemeClr val="accent1"/>
+            </a:effectRef>
+            <a:fontRef idx="minor">
+              <a:schemeClr val="lt1"/>
+            </a:fontRef>
+          </p:style>
+          <p:txBody>
+            <a:bodyPr rtlCol="0" anchor="ctr"/>
+            <a:lstStyle/>
+            <a:p>
+              <a:pPr algn="ctr"/>
+              <a:endParaRPr lang="ko-KR" altLang="en-US" sz="1200" dirty="0">
+                <a:solidFill>
+                  <a:schemeClr val="tx1"/>
+                </a:solidFill>
+                <a:latin typeface="Arial Rounded MT Bold" panose="020F0704030504030204" pitchFamily="34" charset="0"/>
+              </a:endParaRPr>
+            </a:p>
+          </p:txBody>
+        </p:sp>
+        <p:sp>
+          <p:nvSpPr>
+            <p:cNvPr id="203" name="순서도: 문서 202">
+              <a:extLst>
+                <a:ext uri="{FF2B5EF4-FFF2-40B4-BE49-F238E27FC236}">
+                  <a16:creationId xmlns:a16="http://schemas.microsoft.com/office/drawing/2014/main" id="{B4921668-6439-434F-8774-5A1670A9EC08}"/>
+                </a:ext>
+              </a:extLst>
+            </p:cNvPr>
+            <p:cNvSpPr/>
+            <p:nvPr/>
+          </p:nvSpPr>
+          <p:spPr>
+            <a:xfrm>
+              <a:off x="6296605" y="1926028"/>
+              <a:ext cx="1197864" cy="521208"/>
+            </a:xfrm>
+            <a:prstGeom prst="flowChartDocument">
+              <a:avLst/>
+            </a:prstGeom>
+            <a:grpFill/>
+            <a:ln>
+              <a:solidFill>
+                <a:schemeClr val="tx1"/>
+              </a:solidFill>
+            </a:ln>
+          </p:spPr>
+          <p:style>
+            <a:lnRef idx="2">
+              <a:schemeClr val="accent1">
+                <a:shade val="50000"/>
+              </a:schemeClr>
+            </a:lnRef>
+            <a:fillRef idx="1">
+              <a:schemeClr val="accent1"/>
+            </a:fillRef>
+            <a:effectRef idx="0">
+              <a:schemeClr val="accent1"/>
+            </a:effectRef>
+            <a:fontRef idx="minor">
+              <a:schemeClr val="lt1"/>
+            </a:fontRef>
+          </p:style>
+          <p:txBody>
+            <a:bodyPr rtlCol="0" anchor="ctr"/>
+            <a:lstStyle/>
+            <a:p>
+              <a:pPr algn="ctr"/>
+              <a:r>
+                <a:rPr lang="en-US" altLang="ko-KR" sz="1100" dirty="0">
+                  <a:solidFill>
+                    <a:schemeClr val="tx1"/>
+                  </a:solidFill>
+                  <a:latin typeface="Arial Rounded MT Bold" panose="020F0704030504030204" pitchFamily="34" charset="0"/>
+                </a:rPr>
+                <a:t>Resolution</a:t>
+              </a:r>
+            </a:p>
+            <a:p>
+              <a:pPr algn="ctr"/>
+              <a:r>
+                <a:rPr lang="en-US" altLang="ko-KR" sz="1100" dirty="0">
+                  <a:solidFill>
+                    <a:schemeClr val="tx1"/>
+                  </a:solidFill>
+                  <a:latin typeface="Arial Rounded MT Bold" panose="020F0704030504030204" pitchFamily="34" charset="0"/>
+                </a:rPr>
+                <a:t>Document</a:t>
+              </a:r>
+            </a:p>
+          </p:txBody>
+        </p:sp>
+      </p:grpSp>
+      <p:grpSp>
+        <p:nvGrpSpPr>
+          <p:cNvPr id="204" name="그룹 203">
+            <a:extLst>
+              <a:ext uri="{FF2B5EF4-FFF2-40B4-BE49-F238E27FC236}">
+                <a16:creationId xmlns:a16="http://schemas.microsoft.com/office/drawing/2014/main" id="{B9767B69-D53D-497C-A4B2-C02B59AD8662}"/>
+              </a:ext>
+            </a:extLst>
+          </p:cNvPr>
+          <p:cNvGrpSpPr/>
+          <p:nvPr/>
+        </p:nvGrpSpPr>
+        <p:grpSpPr>
+          <a:xfrm>
+            <a:off x="9349397" y="4327968"/>
+            <a:ext cx="1342644" cy="637794"/>
+            <a:chOff x="6296605" y="1809442"/>
+            <a:chExt cx="1342644" cy="637794"/>
+          </a:xfrm>
+          <a:solidFill>
+            <a:schemeClr val="accent2">
+              <a:lumMod val="20000"/>
+              <a:lumOff val="80000"/>
+            </a:schemeClr>
+          </a:solidFill>
+        </p:grpSpPr>
+        <p:sp>
+          <p:nvSpPr>
+            <p:cNvPr id="205" name="순서도: 문서 204">
+              <a:extLst>
+                <a:ext uri="{FF2B5EF4-FFF2-40B4-BE49-F238E27FC236}">
+                  <a16:creationId xmlns:a16="http://schemas.microsoft.com/office/drawing/2014/main" id="{454115E6-8E8B-4B6D-BEA1-2442C3C7DBAC}"/>
+                </a:ext>
+              </a:extLst>
+            </p:cNvPr>
+            <p:cNvSpPr/>
+            <p:nvPr/>
+          </p:nvSpPr>
+          <p:spPr>
+            <a:xfrm>
+              <a:off x="6441385" y="1809442"/>
+              <a:ext cx="1197864" cy="521208"/>
+            </a:xfrm>
+            <a:prstGeom prst="flowChartDocument">
+              <a:avLst/>
+            </a:prstGeom>
+            <a:grpFill/>
+            <a:ln>
+              <a:solidFill>
+                <a:schemeClr val="tx1"/>
+              </a:solidFill>
+            </a:ln>
+          </p:spPr>
+          <p:style>
+            <a:lnRef idx="2">
+              <a:schemeClr val="accent1">
+                <a:shade val="50000"/>
+              </a:schemeClr>
+            </a:lnRef>
+            <a:fillRef idx="1">
+              <a:schemeClr val="accent1"/>
+            </a:fillRef>
+            <a:effectRef idx="0">
+              <a:schemeClr val="accent1"/>
+            </a:effectRef>
+            <a:fontRef idx="minor">
+              <a:schemeClr val="lt1"/>
+            </a:fontRef>
+          </p:style>
+          <p:txBody>
+            <a:bodyPr rtlCol="0" anchor="ctr"/>
+            <a:lstStyle/>
+            <a:p>
+              <a:pPr algn="ctr"/>
+              <a:r>
+                <a:rPr lang="en-US" altLang="ko-KR" sz="1200" dirty="0">
+                  <a:solidFill>
+                    <a:schemeClr val="tx1"/>
+                  </a:solidFill>
+                  <a:latin typeface="Arial Rounded MT Bold" panose="020F0704030504030204" pitchFamily="34" charset="0"/>
+                </a:rPr>
+                <a:t>Resolution</a:t>
+              </a:r>
+            </a:p>
+            <a:p>
+              <a:pPr algn="ctr"/>
+              <a:r>
+                <a:rPr lang="en-US" altLang="ko-KR" sz="1200" dirty="0">
+                  <a:solidFill>
+                    <a:schemeClr val="tx1"/>
+                  </a:solidFill>
+                  <a:latin typeface="Arial Rounded MT Bold" panose="020F0704030504030204" pitchFamily="34" charset="0"/>
+                </a:rPr>
+                <a:t>Document</a:t>
+              </a:r>
+              <a:endParaRPr lang="ko-KR" altLang="en-US" sz="1200" dirty="0">
+                <a:solidFill>
+                  <a:schemeClr val="tx1"/>
+                </a:solidFill>
+                <a:latin typeface="Arial Rounded MT Bold" panose="020F0704030504030204" pitchFamily="34" charset="0"/>
+              </a:endParaRPr>
+            </a:p>
+          </p:txBody>
+        </p:sp>
+        <p:sp>
+          <p:nvSpPr>
+            <p:cNvPr id="206" name="순서도: 문서 205">
+              <a:extLst>
+                <a:ext uri="{FF2B5EF4-FFF2-40B4-BE49-F238E27FC236}">
+                  <a16:creationId xmlns:a16="http://schemas.microsoft.com/office/drawing/2014/main" id="{957796A2-06D3-4461-A5AF-6D939CEFB53A}"/>
+                </a:ext>
+              </a:extLst>
+            </p:cNvPr>
+            <p:cNvSpPr/>
+            <p:nvPr/>
+          </p:nvSpPr>
+          <p:spPr>
+            <a:xfrm>
+              <a:off x="6368995" y="1864306"/>
+              <a:ext cx="1197864" cy="521208"/>
+            </a:xfrm>
+            <a:prstGeom prst="flowChartDocument">
+              <a:avLst/>
+            </a:prstGeom>
+            <a:grpFill/>
+            <a:ln>
+              <a:solidFill>
+                <a:schemeClr val="tx1"/>
+              </a:solidFill>
+            </a:ln>
+          </p:spPr>
+          <p:style>
+            <a:lnRef idx="2">
+              <a:schemeClr val="accent1">
+                <a:shade val="50000"/>
+              </a:schemeClr>
+            </a:lnRef>
+            <a:fillRef idx="1">
+              <a:schemeClr val="accent1"/>
+            </a:fillRef>
+            <a:effectRef idx="0">
+              <a:schemeClr val="accent1"/>
+            </a:effectRef>
+            <a:fontRef idx="minor">
+              <a:schemeClr val="lt1"/>
+            </a:fontRef>
+          </p:style>
+          <p:txBody>
+            <a:bodyPr rtlCol="0" anchor="ctr"/>
+            <a:lstStyle/>
+            <a:p>
+              <a:pPr algn="ctr"/>
+              <a:endParaRPr lang="ko-KR" altLang="en-US" sz="1200" dirty="0">
+                <a:solidFill>
+                  <a:schemeClr val="tx1"/>
+                </a:solidFill>
+                <a:latin typeface="Arial Rounded MT Bold" panose="020F0704030504030204" pitchFamily="34" charset="0"/>
+              </a:endParaRPr>
+            </a:p>
+          </p:txBody>
+        </p:sp>
+        <p:sp>
+          <p:nvSpPr>
+            <p:cNvPr id="207" name="순서도: 문서 206">
+              <a:extLst>
+                <a:ext uri="{FF2B5EF4-FFF2-40B4-BE49-F238E27FC236}">
+                  <a16:creationId xmlns:a16="http://schemas.microsoft.com/office/drawing/2014/main" id="{571D0659-65F9-4AD2-A01E-B9745187A19E}"/>
+                </a:ext>
+              </a:extLst>
+            </p:cNvPr>
+            <p:cNvSpPr/>
+            <p:nvPr/>
+          </p:nvSpPr>
+          <p:spPr>
+            <a:xfrm>
+              <a:off x="6296605" y="1926028"/>
+              <a:ext cx="1197864" cy="521208"/>
+            </a:xfrm>
+            <a:prstGeom prst="flowChartDocument">
+              <a:avLst/>
+            </a:prstGeom>
+            <a:grpFill/>
+            <a:ln>
+              <a:solidFill>
+                <a:schemeClr val="tx1"/>
+              </a:solidFill>
+            </a:ln>
+          </p:spPr>
+          <p:style>
+            <a:lnRef idx="2">
+              <a:schemeClr val="accent1">
+                <a:shade val="50000"/>
+              </a:schemeClr>
+            </a:lnRef>
+            <a:fillRef idx="1">
+              <a:schemeClr val="accent1"/>
+            </a:fillRef>
+            <a:effectRef idx="0">
+              <a:schemeClr val="accent1"/>
+            </a:effectRef>
+            <a:fontRef idx="minor">
+              <a:schemeClr val="lt1"/>
+            </a:fontRef>
+          </p:style>
+          <p:txBody>
+            <a:bodyPr rtlCol="0" anchor="ctr"/>
+            <a:lstStyle/>
+            <a:p>
+              <a:pPr algn="ctr"/>
+              <a:r>
+                <a:rPr lang="en-US" altLang="ko-KR" sz="1100" dirty="0">
+                  <a:solidFill>
+                    <a:schemeClr val="tx1"/>
+                  </a:solidFill>
+                  <a:latin typeface="Arial Rounded MT Bold" panose="020F0704030504030204" pitchFamily="34" charset="0"/>
+                </a:rPr>
+                <a:t>User Scenario</a:t>
+              </a:r>
+            </a:p>
+            <a:p>
+              <a:pPr algn="ctr"/>
+              <a:r>
+                <a:rPr lang="en-US" altLang="ko-KR" sz="1100" dirty="0">
+                  <a:solidFill>
+                    <a:schemeClr val="tx1"/>
+                  </a:solidFill>
+                  <a:latin typeface="Arial Rounded MT Bold" panose="020F0704030504030204" pitchFamily="34" charset="0"/>
+                </a:rPr>
+                <a:t>Document</a:t>
+              </a:r>
+            </a:p>
+          </p:txBody>
+        </p:sp>
+      </p:grpSp>
+      <p:cxnSp>
+        <p:nvCxnSpPr>
+          <p:cNvPr id="214" name="직선 화살표 연결선 213">
+            <a:extLst>
+              <a:ext uri="{FF2B5EF4-FFF2-40B4-BE49-F238E27FC236}">
+                <a16:creationId xmlns:a16="http://schemas.microsoft.com/office/drawing/2014/main" id="{83F38D99-3BFD-4196-AF5D-3DC653292405}"/>
+              </a:ext>
+            </a:extLst>
+          </p:cNvPr>
+          <p:cNvCxnSpPr>
+            <a:cxnSpLocks/>
+          </p:cNvCxnSpPr>
+          <p:nvPr/>
+        </p:nvCxnSpPr>
+        <p:spPr>
+          <a:xfrm>
+            <a:off x="9056629" y="4293267"/>
+            <a:ext cx="229687" cy="0"/>
+          </a:xfrm>
+          <a:prstGeom prst="straightConnector1">
+            <a:avLst/>
+          </a:prstGeom>
+          <a:ln>
+            <a:tailEnd type="triangle"/>
+          </a:ln>
+        </p:spPr>
+        <p:style>
+          <a:lnRef idx="1">
+            <a:schemeClr val="dk1"/>
+          </a:lnRef>
+          <a:fillRef idx="0">
+            <a:schemeClr val="dk1"/>
+          </a:fillRef>
+          <a:effectRef idx="0">
+            <a:schemeClr val="dk1"/>
+          </a:effectRef>
+          <a:fontRef idx="minor">
+            <a:schemeClr val="tx1"/>
+          </a:fontRef>
+        </p:style>
+      </p:cxnSp>
+      <p:sp>
+        <p:nvSpPr>
+          <p:cNvPr id="217" name="직사각형 216">
+            <a:extLst>
+              <a:ext uri="{FF2B5EF4-FFF2-40B4-BE49-F238E27FC236}">
+                <a16:creationId xmlns:a16="http://schemas.microsoft.com/office/drawing/2014/main" id="{7BDFD0D2-2C50-4FCA-994F-CCB562A457D4}"/>
+              </a:ext>
+            </a:extLst>
+          </p:cNvPr>
+          <p:cNvSpPr/>
+          <p:nvPr/>
+        </p:nvSpPr>
+        <p:spPr>
+          <a:xfrm>
+            <a:off x="9286316" y="3500872"/>
+            <a:ext cx="1466850" cy="1587496"/>
+          </a:xfrm>
+          <a:prstGeom prst="rect">
+            <a:avLst/>
+          </a:prstGeom>
+          <a:noFill/>
+          <a:ln>
+            <a:solidFill>
+              <a:schemeClr val="tx1"/>
+            </a:solidFill>
+            <a:prstDash val="dash"/>
+          </a:ln>
+        </p:spPr>
+        <p:style>
+          <a:lnRef idx="2">
+            <a:schemeClr val="accent1">
+              <a:shade val="50000"/>
+            </a:schemeClr>
+          </a:lnRef>
+          <a:fillRef idx="1">
+            <a:schemeClr val="accent1"/>
+          </a:fillRef>
+          <a:effectRef idx="0">
+            <a:schemeClr val="accent1"/>
+          </a:effectRef>
+          <a:fontRef idx="minor">
+            <a:schemeClr val="lt1"/>
+          </a:fontRef>
+        </p:style>
+        <p:txBody>
+          <a:bodyPr rtlCol="0" anchor="ctr"/>
+          <a:lstStyle/>
+          <a:p>
+            <a:pPr algn="ctr"/>
+            <a:endParaRPr lang="ko-KR" altLang="en-US"/>
+          </a:p>
+        </p:txBody>
+      </p:sp>
+      <p:cxnSp>
+        <p:nvCxnSpPr>
+          <p:cNvPr id="222" name="연결선: 꺾임 221">
+            <a:extLst>
+              <a:ext uri="{FF2B5EF4-FFF2-40B4-BE49-F238E27FC236}">
+                <a16:creationId xmlns:a16="http://schemas.microsoft.com/office/drawing/2014/main" id="{07441A7F-B7F9-44AE-90A4-C72D29FFBF81}"/>
+              </a:ext>
+            </a:extLst>
+          </p:cNvPr>
+          <p:cNvCxnSpPr>
+            <a:stCxn id="184" idx="3"/>
+            <a:endCxn id="43" idx="1"/>
+          </p:cNvCxnSpPr>
+          <p:nvPr/>
+        </p:nvCxnSpPr>
+        <p:spPr>
+          <a:xfrm flipV="1">
+            <a:off x="7434541" y="4294620"/>
+            <a:ext cx="317168" cy="410538"/>
+          </a:xfrm>
+          <a:prstGeom prst="bentConnector3">
+            <a:avLst>
+              <a:gd name="adj1" fmla="val 60678"/>
+            </a:avLst>
+          </a:prstGeom>
+          <a:ln>
+            <a:tailEnd type="triangle"/>
+          </a:ln>
+        </p:spPr>
+        <p:style>
+          <a:lnRef idx="1">
+            <a:schemeClr val="dk1"/>
+          </a:lnRef>
+          <a:fillRef idx="0">
+            <a:schemeClr val="dk1"/>
+          </a:fillRef>
+          <a:effectRef idx="0">
+            <a:schemeClr val="dk1"/>
+          </a:effectRef>
+          <a:fontRef idx="minor">
+            <a:schemeClr val="tx1"/>
+          </a:fontRef>
+        </p:style>
+      </p:cxnSp>
+      <p:cxnSp>
+        <p:nvCxnSpPr>
+          <p:cNvPr id="225" name="연결선: 꺾임 224">
+            <a:extLst>
+              <a:ext uri="{FF2B5EF4-FFF2-40B4-BE49-F238E27FC236}">
+                <a16:creationId xmlns:a16="http://schemas.microsoft.com/office/drawing/2014/main" id="{D8AB4B46-8FD8-4861-BB5B-6FDD5873B7D1}"/>
+              </a:ext>
+            </a:extLst>
+          </p:cNvPr>
+          <p:cNvCxnSpPr>
+            <a:cxnSpLocks/>
+            <a:stCxn id="180" idx="3"/>
+            <a:endCxn id="43" idx="1"/>
+          </p:cNvCxnSpPr>
+          <p:nvPr/>
+        </p:nvCxnSpPr>
+        <p:spPr>
+          <a:xfrm>
+            <a:off x="7434541" y="4010963"/>
+            <a:ext cx="317168" cy="283657"/>
+          </a:xfrm>
+          <a:prstGeom prst="bentConnector3">
+            <a:avLst>
+              <a:gd name="adj1" fmla="val 60679"/>
+            </a:avLst>
+          </a:prstGeom>
+          <a:ln>
+            <a:tailEnd type="triangle"/>
+          </a:ln>
+        </p:spPr>
+        <p:style>
+          <a:lnRef idx="1">
+            <a:schemeClr val="dk1"/>
+          </a:lnRef>
+          <a:fillRef idx="0">
+            <a:schemeClr val="dk1"/>
+          </a:fillRef>
+          <a:effectRef idx="0">
+            <a:schemeClr val="dk1"/>
+          </a:effectRef>
+          <a:fontRef idx="minor">
+            <a:schemeClr val="tx1"/>
+          </a:fontRef>
+        </p:style>
+      </p:cxnSp>
+      <p:cxnSp>
+        <p:nvCxnSpPr>
+          <p:cNvPr id="230" name="직선 화살표 연결선 229">
+            <a:extLst>
+              <a:ext uri="{FF2B5EF4-FFF2-40B4-BE49-F238E27FC236}">
+                <a16:creationId xmlns:a16="http://schemas.microsoft.com/office/drawing/2014/main" id="{5E342091-5B1B-42DF-8270-F07E62827ED4}"/>
+              </a:ext>
+            </a:extLst>
+          </p:cNvPr>
+          <p:cNvCxnSpPr>
+            <a:stCxn id="217" idx="0"/>
+            <a:endCxn id="41" idx="2"/>
+          </p:cNvCxnSpPr>
+          <p:nvPr/>
+        </p:nvCxnSpPr>
+        <p:spPr>
+          <a:xfrm flipV="1">
+            <a:off x="10019741" y="3283411"/>
+            <a:ext cx="808" cy="217461"/>
+          </a:xfrm>
+          <a:prstGeom prst="straightConnector1">
+            <a:avLst/>
+          </a:prstGeom>
+          <a:ln>
+            <a:tailEnd type="triangle"/>
+          </a:ln>
+        </p:spPr>
+        <p:style>
+          <a:lnRef idx="1">
+            <a:schemeClr val="dk1"/>
+          </a:lnRef>
+          <a:fillRef idx="0">
+            <a:schemeClr val="dk1"/>
+          </a:fillRef>
+          <a:effectRef idx="0">
+            <a:schemeClr val="dk1"/>
+          </a:effectRef>
+          <a:fontRef idx="minor">
+            <a:schemeClr val="tx1"/>
+          </a:fontRef>
+        </p:style>
+      </p:cxnSp>
+    </p:spTree>
+    <p:extLst>
+      <p:ext uri="{BB962C8B-B14F-4D97-AF65-F5344CB8AC3E}">
+        <p14:creationId xmlns:p14="http://schemas.microsoft.com/office/powerpoint/2010/main" val="407195141"/>
       </p:ext>
     </p:extLst>
   </p:cSld>
